--- a/dead_internet.pptx
+++ b/dead_internet.pptx
@@ -4,18 +4,18 @@
   <p:sldMasterIdLst>
     <p:sldMasterId id="2147483648" r:id="rId1"/>
   </p:sldMasterIdLst>
-  <p:notesMasterIdLst>
-    <p:notesMasterId r:id="rId8"/>
-  </p:notesMasterIdLst>
   <p:sldIdLst>
     <p:sldId id="256" r:id="rId2"/>
     <p:sldId id="257" r:id="rId3"/>
     <p:sldId id="258" r:id="rId4"/>
     <p:sldId id="259" r:id="rId5"/>
-    <p:sldId id="261" r:id="rId6"/>
-    <p:sldId id="260" r:id="rId7"/>
+    <p:sldId id="260" r:id="rId6"/>
+    <p:sldId id="261" r:id="rId7"/>
   </p:sldIdLst>
-  <p:sldSz cx="9144000" cy="5143500" type="screen16x9"/>
+  <p:notesMasterIdLst>
+    <p:notesMasterId r:id="rId8"/>
+  </p:notesMasterIdLst>
+  <p:sldSz cx="9144000" cy="5143500"/>
   <p:notesSz cx="5143500" cy="9144000"/>
   <p:defaultTextStyle>
     <a:lvl1pPr marL="0" algn="l" defTabSz="914400" rtl="0" eaLnBrk="1" latinLnBrk="0" hangingPunct="1">
@@ -109,11 +109,6 @@
       </a:defRPr>
     </a:lvl9pPr>
   </p:defaultTextStyle>
-  <p:extLst>
-    <p:ext uri="{EFAFB233-063F-42B5-8137-9DF3F51BA10A}">
-      <p15:sldGuideLst xmlns:p15="http://schemas.microsoft.com/office/powerpoint/2012/main"/>
-    </p:ext>
-  </p:extLst>
 </p:presentation>
 </file>
 
@@ -139,10 +134,234 @@
           <a:chExt cx="0" cy="0"/>
         </a:xfrm>
       </p:grpSpPr>
+      <p:sp>
+        <p:nvSpPr>
+          <p:cNvPr id="2" name="Header Placeholder 1"/>
+          <p:cNvSpPr>
+            <a:spLocks noGrp="1"/>
+          </p:cNvSpPr>
+          <p:nvPr>
+            <p:ph type="hdr" sz="quarter"/>
+          </p:nvPr>
+        </p:nvSpPr>
+        <p:spPr>
+          <a:xfrm>
+            <a:off x="0" y="0"/>
+            <a:ext cx="2971800" cy="458788"/>
+          </a:xfrm>
+          <a:prstGeom prst="rect">
+            <a:avLst/>
+          </a:prstGeom>
+        </p:spPr>
+        <p:txBody>
+          <a:bodyPr vert="horz" lIns="91440" tIns="45720" rIns="91440" bIns="45720" rtlCol="0"/>
+          <a:lstStyle>
+            <a:lvl1pPr algn="l">
+              <a:defRPr sz="1200"/>
+            </a:lvl1pPr>
+          </a:lstStyle>
+          <a:p>
+            <a:endParaRPr lang="en-US"/>
+          </a:p>
+        </p:txBody>
+      </p:sp>
+      <p:sp>
+        <p:nvSpPr>
+          <p:cNvPr id="3" name="Date Placeholder 2"/>
+          <p:cNvSpPr>
+            <a:spLocks noGrp="1"/>
+          </p:cNvSpPr>
+          <p:nvPr>
+            <p:ph type="dt" idx="1"/>
+          </p:nvPr>
+        </p:nvSpPr>
+        <p:spPr>
+          <a:xfrm>
+            <a:off x="3884613" y="0"/>
+            <a:ext cx="2971800" cy="458788"/>
+          </a:xfrm>
+          <a:prstGeom prst="rect">
+            <a:avLst/>
+          </a:prstGeom>
+        </p:spPr>
+        <p:txBody>
+          <a:bodyPr vert="horz" lIns="91440" tIns="45720" rIns="91440" bIns="45720" rtlCol="0"/>
+          <a:lstStyle>
+            <a:lvl1pPr algn="r">
+              <a:defRPr sz="1200"/>
+            </a:lvl1pPr>
+          </a:lstStyle>
+          <a:p>
+            <a:fld id="{5282F153-3F37-0F45-9E97-73ACFA13230C}" type="datetimeFigureOut">
+              <a:rPr lang="en-US"/>
+              <a:t>7/23/19</a:t>
+            </a:fld>
+            <a:endParaRPr lang="en-US"/>
+          </a:p>
+        </p:txBody>
+      </p:sp>
+      <p:sp>
+        <p:nvSpPr>
+          <p:cNvPr id="4" name="Slide Image Placeholder 3"/>
+          <p:cNvSpPr>
+            <a:spLocks noGrp="1" noRot="1" noChangeAspect="1"/>
+          </p:cNvSpPr>
+          <p:nvPr>
+            <p:ph type="sldImg" idx="2"/>
+          </p:nvPr>
+        </p:nvSpPr>
+        <p:spPr>
+          <a:xfrm>
+            <a:off x="685800" y="1143000"/>
+            <a:ext cx="5486400" cy="3086100"/>
+          </a:xfrm>
+          <a:prstGeom prst="rect">
+            <a:avLst/>
+          </a:prstGeom>
+          <a:noFill/>
+          <a:ln w="12700">
+            <a:solidFill>
+              <a:prstClr val="black"/>
+            </a:solidFill>
+          </a:ln>
+        </p:spPr>
+        <p:txBody>
+          <a:bodyPr vert="horz" lIns="91440" tIns="45720" rIns="91440" bIns="45720" rtlCol="0" anchor="ctr"/>
+          <a:lstStyle/>
+          <a:p>
+            <a:endParaRPr lang="en-US"/>
+          </a:p>
+        </p:txBody>
+      </p:sp>
+      <p:sp>
+        <p:nvSpPr>
+          <p:cNvPr id="5" name="Notes Placeholder 4"/>
+          <p:cNvSpPr>
+            <a:spLocks noGrp="1"/>
+          </p:cNvSpPr>
+          <p:nvPr>
+            <p:ph type="body" sz="quarter" idx="3"/>
+          </p:nvPr>
+        </p:nvSpPr>
+        <p:spPr>
+          <a:xfrm>
+            <a:off x="685800" y="4400550"/>
+            <a:ext cx="5486400" cy="3600450"/>
+          </a:xfrm>
+          <a:prstGeom prst="rect">
+            <a:avLst/>
+          </a:prstGeom>
+        </p:spPr>
+        <p:txBody>
+          <a:bodyPr vert="horz" lIns="91440" tIns="45720" rIns="91440" bIns="45720" rtlCol="0"/>
+          <a:lstStyle/>
+          <a:p>
+            <a:pPr lvl="0"/>
+            <a:r>
+              <a:rPr lang="en-US"/>
+              <a:t>Click to edit Master text styles</a:t>
+            </a:r>
+          </a:p>
+          <a:p>
+            <a:pPr lvl="1"/>
+            <a:r>
+              <a:rPr lang="en-US"/>
+              <a:t>Second level</a:t>
+            </a:r>
+          </a:p>
+          <a:p>
+            <a:pPr lvl="2"/>
+            <a:r>
+              <a:rPr lang="en-US"/>
+              <a:t>Third level</a:t>
+            </a:r>
+          </a:p>
+          <a:p>
+            <a:pPr lvl="3"/>
+            <a:r>
+              <a:rPr lang="en-US"/>
+              <a:t>Fourth level</a:t>
+            </a:r>
+          </a:p>
+          <a:p>
+            <a:pPr lvl="4"/>
+            <a:r>
+              <a:rPr lang="en-US"/>
+              <a:t>Fifth level</a:t>
+            </a:r>
+          </a:p>
+        </p:txBody>
+      </p:sp>
+      <p:sp>
+        <p:nvSpPr>
+          <p:cNvPr id="6" name="Footer Placeholder 5"/>
+          <p:cNvSpPr>
+            <a:spLocks noGrp="1"/>
+          </p:cNvSpPr>
+          <p:nvPr>
+            <p:ph type="ftr" sz="quarter" idx="4"/>
+          </p:nvPr>
+        </p:nvSpPr>
+        <p:spPr>
+          <a:xfrm>
+            <a:off x="0" y="8685213"/>
+            <a:ext cx="2971800" cy="458787"/>
+          </a:xfrm>
+          <a:prstGeom prst="rect">
+            <a:avLst/>
+          </a:prstGeom>
+        </p:spPr>
+        <p:txBody>
+          <a:bodyPr vert="horz" lIns="91440" tIns="45720" rIns="91440" bIns="45720" rtlCol="0" anchor="b"/>
+          <a:lstStyle>
+            <a:lvl1pPr algn="l">
+              <a:defRPr sz="1200"/>
+            </a:lvl1pPr>
+          </a:lstStyle>
+          <a:p>
+            <a:endParaRPr lang="en-US"/>
+          </a:p>
+        </p:txBody>
+      </p:sp>
+      <p:sp>
+        <p:nvSpPr>
+          <p:cNvPr id="7" name="Slide Number Placeholder 6"/>
+          <p:cNvSpPr>
+            <a:spLocks noGrp="1"/>
+          </p:cNvSpPr>
+          <p:nvPr>
+            <p:ph type="sldNum" sz="quarter" idx="5"/>
+          </p:nvPr>
+        </p:nvSpPr>
+        <p:spPr>
+          <a:xfrm>
+            <a:off x="3884613" y="8685213"/>
+            <a:ext cx="2971800" cy="458787"/>
+          </a:xfrm>
+          <a:prstGeom prst="rect">
+            <a:avLst/>
+          </a:prstGeom>
+        </p:spPr>
+        <p:txBody>
+          <a:bodyPr vert="horz" lIns="91440" tIns="45720" rIns="91440" bIns="45720" rtlCol="0" anchor="b"/>
+          <a:lstStyle>
+            <a:lvl1pPr algn="r">
+              <a:defRPr sz="1200"/>
+            </a:lvl1pPr>
+          </a:lstStyle>
+          <a:p>
+            <a:fld id="{CE5E9CC1-C706-0F49-92D6-E571CC5EEA8F}" type="slidenum">
+              <a:rPr lang="en-US"/>
+              <a:t>‹#›</a:t>
+            </a:fld>
+            <a:endParaRPr lang="en-US"/>
+          </a:p>
+        </p:txBody>
+      </p:sp>
     </p:spTree>
     <p:extLst>
       <p:ext uri="{BB962C8B-B14F-4D97-AF65-F5344CB8AC3E}">
-        <p14:creationId xmlns:p14="http://schemas.microsoft.com/office/powerpoint/2010/main" val="1632862135"/>
+        <p14:creationId xmlns:p14="http://schemas.microsoft.com/office/powerpoint/2010/main" val="1024086991"/>
       </p:ext>
     </p:extLst>
   </p:cSld>
@@ -286,6 +505,10 @@
           <a:bodyPr/>
           <a:lstStyle/>
           <a:p>
+            <a:r>
+              <a:rPr lang="en-US" dirty="0"/>
+              <a:t/>
+            </a:r>
             <a:endParaRPr lang="en-US" dirty="0"/>
           </a:p>
         </p:txBody>
@@ -370,6 +593,10 @@
           <a:bodyPr/>
           <a:lstStyle/>
           <a:p>
+            <a:r>
+              <a:rPr lang="en-US" dirty="0"/>
+              <a:t/>
+            </a:r>
             <a:endParaRPr lang="en-US" dirty="0"/>
           </a:p>
         </p:txBody>
@@ -454,6 +681,10 @@
           <a:bodyPr/>
           <a:lstStyle/>
           <a:p>
+            <a:r>
+              <a:rPr lang="en-US" dirty="0"/>
+              <a:t/>
+            </a:r>
             <a:endParaRPr lang="en-US" dirty="0"/>
           </a:p>
         </p:txBody>
@@ -538,6 +769,10 @@
           <a:bodyPr/>
           <a:lstStyle/>
           <a:p>
+            <a:r>
+              <a:rPr lang="en-US" dirty="0"/>
+              <a:t/>
+            </a:r>
             <a:endParaRPr lang="en-US" dirty="0"/>
           </a:p>
         </p:txBody>
@@ -622,6 +857,98 @@
           <a:bodyPr/>
           <a:lstStyle/>
           <a:p>
+            <a:r>
+              <a:rPr lang="en-US" dirty="0"/>
+              <a:t/>
+            </a:r>
+            <a:endParaRPr lang="en-US" dirty="0"/>
+          </a:p>
+        </p:txBody>
+      </p:sp>
+      <p:sp>
+        <p:nvSpPr>
+          <p:cNvPr id="4" name="Slide Number Placeholder 3"/>
+          <p:cNvSpPr>
+            <a:spLocks noGrp="1"/>
+          </p:cNvSpPr>
+          <p:nvPr>
+            <p:ph type="sldNum" sz="quarter" idx="10"/>
+          </p:nvPr>
+        </p:nvSpPr>
+        <p:spPr/>
+        <p:txBody>
+          <a:bodyPr/>
+          <a:lstStyle/>
+          <a:p>
+            <a:fld id="{F7021451-1387-4CA6-816F-3879F97B5CBC}" type="slidenum">
+              <a:rPr lang="en-US"/>
+              <a:t>5</a:t>
+            </a:fld>
+            <a:endParaRPr lang="en-US"/>
+          </a:p>
+        </p:txBody>
+      </p:sp>
+    </p:spTree>
+    <p:extLst>
+      <p:ext uri="{BB962C8B-B14F-4D97-AF65-F5344CB8AC3E}">
+        <p14:creationId xmlns:p14="http://schemas.microsoft.com/office/powerpoint/2010/main" val="1024086991"/>
+      </p:ext>
+    </p:extLst>
+  </p:cSld>
+  <p:clrMapOvr>
+    <a:masterClrMapping/>
+  </p:clrMapOvr>
+</p:notes>
+</file>
+
+<file path=ppt/notesSlides/notesSlide6.xml><?xml version="1.0" encoding="utf-8"?>
+<p:notes xmlns:a="http://schemas.openxmlformats.org/drawingml/2006/main" xmlns:r="http://schemas.openxmlformats.org/officeDocument/2006/relationships" xmlns:p="http://schemas.openxmlformats.org/presentationml/2006/main">
+  <p:cSld>
+    <p:spTree>
+      <p:nvGrpSpPr>
+        <p:cNvPr id="1" name=""/>
+        <p:cNvGrpSpPr/>
+        <p:nvPr/>
+      </p:nvGrpSpPr>
+      <p:grpSpPr>
+        <a:xfrm>
+          <a:off x="0" y="0"/>
+          <a:ext cx="0" cy="0"/>
+          <a:chOff x="0" y="0"/>
+          <a:chExt cx="0" cy="0"/>
+        </a:xfrm>
+      </p:grpSpPr>
+      <p:sp>
+        <p:nvSpPr>
+          <p:cNvPr id="2" name="Slide Image Placeholder 1"/>
+          <p:cNvSpPr>
+            <a:spLocks noGrp="1" noRot="1" noChangeAspect="1"/>
+          </p:cNvSpPr>
+          <p:nvPr>
+            <p:ph type="sldImg"/>
+          </p:nvPr>
+        </p:nvSpPr>
+        <p:spPr/>
+      </p:sp>
+      <p:sp>
+        <p:nvSpPr>
+          <p:cNvPr id="3" name="Notes Placeholder 2"/>
+          <p:cNvSpPr>
+            <a:spLocks noGrp="1"/>
+          </p:cNvSpPr>
+          <p:nvPr>
+            <p:ph type="body" idx="1"/>
+          </p:nvPr>
+        </p:nvSpPr>
+        <p:spPr/>
+        <p:txBody>
+          <a:bodyPr/>
+          <a:lstStyle/>
+          <a:p>
+            <a:r>
+              <a:rPr lang="en-US" dirty="0"/>
+              <a:t/>
+            </a:r>
             <a:endParaRPr lang="en-US" dirty="0"/>
           </a:p>
         </p:txBody>
@@ -695,11 +1022,6 @@
 <file path=ppt/slideMasters/slideMaster1.xml><?xml version="1.0" encoding="utf-8"?>
 <p:sldMaster xmlns:a="http://schemas.openxmlformats.org/drawingml/2006/main" xmlns:r="http://schemas.openxmlformats.org/officeDocument/2006/relationships" xmlns:p="http://schemas.openxmlformats.org/presentationml/2006/main">
   <p:cSld>
-    <p:bg>
-      <p:bgRef idx="1001">
-        <a:schemeClr val="bg1"/>
-      </p:bgRef>
-    </p:bg>
     <p:spTree>
       <p:nvGrpSpPr>
         <p:cNvPr id="1" name=""/>
@@ -982,7 +1304,6 @@
         <a:solidFill>
           <a:srgbClr val="0F172A"/>
         </a:solidFill>
-        <a:effectLst/>
       </p:bgPr>
     </p:bg>
     <p:spTree>
@@ -1025,13 +1346,6 @@
             <a:prstDash val="solid"/>
           </a:ln>
         </p:spPr>
-        <p:txBody>
-          <a:bodyPr/>
-          <a:lstStyle/>
-          <a:p>
-            <a:endParaRPr lang="en-US"/>
-          </a:p>
-        </p:txBody>
       </p:sp>
       <p:sp>
         <p:nvSpPr>
@@ -1057,13 +1371,6 @@
             <a:prstDash val="solid"/>
           </a:ln>
         </p:spPr>
-        <p:txBody>
-          <a:bodyPr/>
-          <a:lstStyle/>
-          <a:p>
-            <a:endParaRPr lang="en-US"/>
-          </a:p>
-        </p:txBody>
       </p:sp>
       <p:sp>
         <p:nvSpPr>
@@ -1091,13 +1398,6 @@
             <a:prstDash val="solid"/>
           </a:ln>
         </p:spPr>
-        <p:txBody>
-          <a:bodyPr/>
-          <a:lstStyle/>
-          <a:p>
-            <a:endParaRPr lang="en-US"/>
-          </a:p>
-        </p:txBody>
       </p:sp>
       <p:sp>
         <p:nvSpPr>
@@ -1123,13 +1423,6 @@
             <a:prstDash val="solid"/>
           </a:ln>
         </p:spPr>
-        <p:txBody>
-          <a:bodyPr/>
-          <a:lstStyle/>
-          <a:p>
-            <a:endParaRPr lang="en-US"/>
-          </a:p>
-        </p:txBody>
       </p:sp>
       <p:sp>
         <p:nvSpPr>
@@ -1155,13 +1448,6 @@
             <a:prstDash val="solid"/>
           </a:ln>
         </p:spPr>
-        <p:txBody>
-          <a:bodyPr/>
-          <a:lstStyle/>
-          <a:p>
-            <a:endParaRPr lang="en-US"/>
-          </a:p>
-        </p:txBody>
       </p:sp>
       <p:sp>
         <p:nvSpPr>
@@ -1189,13 +1475,6 @@
             <a:prstDash val="solid"/>
           </a:ln>
         </p:spPr>
-        <p:txBody>
-          <a:bodyPr/>
-          <a:lstStyle/>
-          <a:p>
-            <a:endParaRPr lang="en-US"/>
-          </a:p>
-        </p:txBody>
       </p:sp>
       <p:sp>
         <p:nvSpPr>
@@ -1221,13 +1500,6 @@
             <a:prstDash val="solid"/>
           </a:ln>
         </p:spPr>
-        <p:txBody>
-          <a:bodyPr/>
-          <a:lstStyle/>
-          <a:p>
-            <a:endParaRPr lang="en-US"/>
-          </a:p>
-        </p:txBody>
       </p:sp>
       <p:sp>
         <p:nvSpPr>
@@ -1255,13 +1527,6 @@
             <a:prstDash val="solid"/>
           </a:ln>
         </p:spPr>
-        <p:txBody>
-          <a:bodyPr/>
-          <a:lstStyle/>
-          <a:p>
-            <a:endParaRPr lang="en-US"/>
-          </a:p>
-        </p:txBody>
       </p:sp>
       <p:sp>
         <p:nvSpPr>
@@ -1287,13 +1552,6 @@
             <a:prstDash val="solid"/>
           </a:ln>
         </p:spPr>
-        <p:txBody>
-          <a:bodyPr/>
-          <a:lstStyle/>
-          <a:p>
-            <a:endParaRPr lang="en-US"/>
-          </a:p>
-        </p:txBody>
       </p:sp>
       <p:sp>
         <p:nvSpPr>
@@ -1321,13 +1579,6 @@
             <a:prstDash val="solid"/>
           </a:ln>
         </p:spPr>
-        <p:txBody>
-          <a:bodyPr/>
-          <a:lstStyle/>
-          <a:p>
-            <a:endParaRPr lang="en-US"/>
-          </a:p>
-        </p:txBody>
       </p:sp>
       <p:sp>
         <p:nvSpPr>
@@ -1355,13 +1606,6 @@
             <a:prstDash val="solid"/>
           </a:ln>
         </p:spPr>
-        <p:txBody>
-          <a:bodyPr/>
-          <a:lstStyle/>
-          <a:p>
-            <a:endParaRPr lang="en-US"/>
-          </a:p>
-        </p:txBody>
       </p:sp>
       <p:sp>
         <p:nvSpPr>
@@ -1387,13 +1631,6 @@
             <a:prstDash val="solid"/>
           </a:ln>
         </p:spPr>
-        <p:txBody>
-          <a:bodyPr/>
-          <a:lstStyle/>
-          <a:p>
-            <a:endParaRPr lang="en-US"/>
-          </a:p>
-        </p:txBody>
       </p:sp>
       <p:sp>
         <p:nvSpPr>
@@ -1419,13 +1656,6 @@
             <a:prstDash val="solid"/>
           </a:ln>
         </p:spPr>
-        <p:txBody>
-          <a:bodyPr/>
-          <a:lstStyle/>
-          <a:p>
-            <a:endParaRPr lang="en-US"/>
-          </a:p>
-        </p:txBody>
       </p:sp>
       <p:sp>
         <p:nvSpPr>
@@ -1453,13 +1683,6 @@
             <a:prstDash val="solid"/>
           </a:ln>
         </p:spPr>
-        <p:txBody>
-          <a:bodyPr/>
-          <a:lstStyle/>
-          <a:p>
-            <a:endParaRPr lang="en-US"/>
-          </a:p>
-        </p:txBody>
       </p:sp>
       <p:sp>
         <p:nvSpPr>
@@ -1485,13 +1708,6 @@
             <a:prstDash val="solid"/>
           </a:ln>
         </p:spPr>
-        <p:txBody>
-          <a:bodyPr/>
-          <a:lstStyle/>
-          <a:p>
-            <a:endParaRPr lang="en-US"/>
-          </a:p>
-        </p:txBody>
       </p:sp>
       <p:sp>
         <p:nvSpPr>
@@ -1519,13 +1735,6 @@
             <a:prstDash val="solid"/>
           </a:ln>
         </p:spPr>
-        <p:txBody>
-          <a:bodyPr/>
-          <a:lstStyle/>
-          <a:p>
-            <a:endParaRPr lang="en-US"/>
-          </a:p>
-        </p:txBody>
       </p:sp>
       <p:sp>
         <p:nvSpPr>
@@ -1553,13 +1762,6 @@
             <a:prstDash val="solid"/>
           </a:ln>
         </p:spPr>
-        <p:txBody>
-          <a:bodyPr/>
-          <a:lstStyle/>
-          <a:p>
-            <a:endParaRPr lang="en-US"/>
-          </a:p>
-        </p:txBody>
       </p:sp>
       <p:sp>
         <p:nvSpPr>
@@ -1585,13 +1787,6 @@
             <a:prstDash val="solid"/>
           </a:ln>
         </p:spPr>
-        <p:txBody>
-          <a:bodyPr/>
-          <a:lstStyle/>
-          <a:p>
-            <a:endParaRPr lang="en-US"/>
-          </a:p>
-        </p:txBody>
       </p:sp>
       <p:sp>
         <p:nvSpPr>
@@ -1617,13 +1812,6 @@
             <a:prstDash val="solid"/>
           </a:ln>
         </p:spPr>
-        <p:txBody>
-          <a:bodyPr/>
-          <a:lstStyle/>
-          <a:p>
-            <a:endParaRPr lang="en-US"/>
-          </a:p>
-        </p:txBody>
       </p:sp>
       <p:sp>
         <p:nvSpPr>
@@ -1651,13 +1839,6 @@
             <a:prstDash val="solid"/>
           </a:ln>
         </p:spPr>
-        <p:txBody>
-          <a:bodyPr/>
-          <a:lstStyle/>
-          <a:p>
-            <a:endParaRPr lang="en-US"/>
-          </a:p>
-        </p:txBody>
       </p:sp>
       <p:sp>
         <p:nvSpPr>
@@ -1685,13 +1866,6 @@
             <a:prstDash val="solid"/>
           </a:ln>
         </p:spPr>
-        <p:txBody>
-          <a:bodyPr/>
-          <a:lstStyle/>
-          <a:p>
-            <a:endParaRPr lang="en-US"/>
-          </a:p>
-        </p:txBody>
       </p:sp>
       <p:sp>
         <p:nvSpPr>
@@ -1717,13 +1891,6 @@
             <a:prstDash val="solid"/>
           </a:ln>
         </p:spPr>
-        <p:txBody>
-          <a:bodyPr/>
-          <a:lstStyle/>
-          <a:p>
-            <a:endParaRPr lang="en-US"/>
-          </a:p>
-        </p:txBody>
       </p:sp>
       <p:sp>
         <p:nvSpPr>
@@ -1749,13 +1916,6 @@
             <a:prstDash val="solid"/>
           </a:ln>
         </p:spPr>
-        <p:txBody>
-          <a:bodyPr/>
-          <a:lstStyle/>
-          <a:p>
-            <a:endParaRPr lang="en-US"/>
-          </a:p>
-        </p:txBody>
       </p:sp>
       <p:sp>
         <p:nvSpPr>
@@ -1783,13 +1943,6 @@
             <a:prstDash val="solid"/>
           </a:ln>
         </p:spPr>
-        <p:txBody>
-          <a:bodyPr/>
-          <a:lstStyle/>
-          <a:p>
-            <a:endParaRPr lang="en-US"/>
-          </a:p>
-        </p:txBody>
       </p:sp>
       <p:sp>
         <p:nvSpPr>
@@ -1815,13 +1968,6 @@
             <a:prstDash val="solid"/>
           </a:ln>
         </p:spPr>
-        <p:txBody>
-          <a:bodyPr/>
-          <a:lstStyle/>
-          <a:p>
-            <a:endParaRPr lang="en-US"/>
-          </a:p>
-        </p:txBody>
       </p:sp>
       <p:sp>
         <p:nvSpPr>
@@ -1849,13 +1995,6 @@
             <a:prstDash val="solid"/>
           </a:ln>
         </p:spPr>
-        <p:txBody>
-          <a:bodyPr/>
-          <a:lstStyle/>
-          <a:p>
-            <a:endParaRPr lang="en-US"/>
-          </a:p>
-        </p:txBody>
       </p:sp>
       <p:sp>
         <p:nvSpPr>
@@ -1881,13 +2020,6 @@
             <a:prstDash val="solid"/>
           </a:ln>
         </p:spPr>
-        <p:txBody>
-          <a:bodyPr/>
-          <a:lstStyle/>
-          <a:p>
-            <a:endParaRPr lang="en-US"/>
-          </a:p>
-        </p:txBody>
       </p:sp>
       <p:sp>
         <p:nvSpPr>
@@ -1915,13 +2047,6 @@
             <a:prstDash val="solid"/>
           </a:ln>
         </p:spPr>
-        <p:txBody>
-          <a:bodyPr/>
-          <a:lstStyle/>
-          <a:p>
-            <a:endParaRPr lang="en-US"/>
-          </a:p>
-        </p:txBody>
       </p:sp>
       <p:sp>
         <p:nvSpPr>
@@ -1947,13 +2072,6 @@
             <a:prstDash val="solid"/>
           </a:ln>
         </p:spPr>
-        <p:txBody>
-          <a:bodyPr/>
-          <a:lstStyle/>
-          <a:p>
-            <a:endParaRPr lang="en-US"/>
-          </a:p>
-        </p:txBody>
       </p:sp>
       <p:sp>
         <p:nvSpPr>
@@ -1981,13 +2099,6 @@
             <a:prstDash val="solid"/>
           </a:ln>
         </p:spPr>
-        <p:txBody>
-          <a:bodyPr/>
-          <a:lstStyle/>
-          <a:p>
-            <a:endParaRPr lang="en-US"/>
-          </a:p>
-        </p:txBody>
       </p:sp>
       <p:sp>
         <p:nvSpPr>
@@ -2015,13 +2126,6 @@
             <a:prstDash val="solid"/>
           </a:ln>
         </p:spPr>
-        <p:txBody>
-          <a:bodyPr/>
-          <a:lstStyle/>
-          <a:p>
-            <a:endParaRPr lang="en-US"/>
-          </a:p>
-        </p:txBody>
       </p:sp>
       <p:sp>
         <p:nvSpPr>
@@ -2047,13 +2151,6 @@
             <a:prstDash val="solid"/>
           </a:ln>
         </p:spPr>
-        <p:txBody>
-          <a:bodyPr/>
-          <a:lstStyle/>
-          <a:p>
-            <a:endParaRPr lang="en-US"/>
-          </a:p>
-        </p:txBody>
       </p:sp>
       <p:sp>
         <p:nvSpPr>
@@ -2079,13 +2176,6 @@
             <a:prstDash val="solid"/>
           </a:ln>
         </p:spPr>
-        <p:txBody>
-          <a:bodyPr/>
-          <a:lstStyle/>
-          <a:p>
-            <a:endParaRPr lang="en-US"/>
-          </a:p>
-        </p:txBody>
       </p:sp>
       <p:sp>
         <p:nvSpPr>
@@ -2113,13 +2203,6 @@
             <a:prstDash val="solid"/>
           </a:ln>
         </p:spPr>
-        <p:txBody>
-          <a:bodyPr/>
-          <a:lstStyle/>
-          <a:p>
-            <a:endParaRPr lang="en-US"/>
-          </a:p>
-        </p:txBody>
       </p:sp>
       <p:sp>
         <p:nvSpPr>
@@ -2145,13 +2228,6 @@
             <a:prstDash val="solid"/>
           </a:ln>
         </p:spPr>
-        <p:txBody>
-          <a:bodyPr/>
-          <a:lstStyle/>
-          <a:p>
-            <a:endParaRPr lang="en-US"/>
-          </a:p>
-        </p:txBody>
       </p:sp>
       <p:sp>
         <p:nvSpPr>
@@ -2179,13 +2255,6 @@
             <a:prstDash val="solid"/>
           </a:ln>
         </p:spPr>
-        <p:txBody>
-          <a:bodyPr/>
-          <a:lstStyle/>
-          <a:p>
-            <a:endParaRPr lang="en-US"/>
-          </a:p>
-        </p:txBody>
       </p:sp>
       <p:sp>
         <p:nvSpPr>
@@ -2211,13 +2280,6 @@
             <a:prstDash val="solid"/>
           </a:ln>
         </p:spPr>
-        <p:txBody>
-          <a:bodyPr/>
-          <a:lstStyle/>
-          <a:p>
-            <a:endParaRPr lang="en-US"/>
-          </a:p>
-        </p:txBody>
       </p:sp>
       <p:sp>
         <p:nvSpPr>
@@ -2245,13 +2307,6 @@
             <a:prstDash val="solid"/>
           </a:ln>
         </p:spPr>
-        <p:txBody>
-          <a:bodyPr/>
-          <a:lstStyle/>
-          <a:p>
-            <a:endParaRPr lang="en-US"/>
-          </a:p>
-        </p:txBody>
       </p:sp>
       <p:sp>
         <p:nvSpPr>
@@ -2277,13 +2332,6 @@
             <a:prstDash val="solid"/>
           </a:ln>
         </p:spPr>
-        <p:txBody>
-          <a:bodyPr/>
-          <a:lstStyle/>
-          <a:p>
-            <a:endParaRPr lang="en-US"/>
-          </a:p>
-        </p:txBody>
       </p:sp>
       <p:sp>
         <p:nvSpPr>
@@ -2311,13 +2359,6 @@
             <a:prstDash val="solid"/>
           </a:ln>
         </p:spPr>
-        <p:txBody>
-          <a:bodyPr/>
-          <a:lstStyle/>
-          <a:p>
-            <a:endParaRPr lang="en-US"/>
-          </a:p>
-        </p:txBody>
       </p:sp>
       <p:sp>
         <p:nvSpPr>
@@ -2343,13 +2384,6 @@
             <a:prstDash val="solid"/>
           </a:ln>
         </p:spPr>
-        <p:txBody>
-          <a:bodyPr/>
-          <a:lstStyle/>
-          <a:p>
-            <a:endParaRPr lang="en-US"/>
-          </a:p>
-        </p:txBody>
       </p:sp>
       <p:sp>
         <p:nvSpPr>
@@ -2377,13 +2411,6 @@
             <a:prstDash val="solid"/>
           </a:ln>
         </p:spPr>
-        <p:txBody>
-          <a:bodyPr/>
-          <a:lstStyle/>
-          <a:p>
-            <a:endParaRPr lang="en-US"/>
-          </a:p>
-        </p:txBody>
       </p:sp>
       <p:sp>
         <p:nvSpPr>
@@ -2409,13 +2436,6 @@
             <a:prstDash val="solid"/>
           </a:ln>
         </p:spPr>
-        <p:txBody>
-          <a:bodyPr/>
-          <a:lstStyle/>
-          <a:p>
-            <a:endParaRPr lang="en-US"/>
-          </a:p>
-        </p:txBody>
       </p:sp>
       <p:sp>
         <p:nvSpPr>
@@ -2443,13 +2463,6 @@
             <a:prstDash val="solid"/>
           </a:ln>
         </p:spPr>
-        <p:txBody>
-          <a:bodyPr/>
-          <a:lstStyle/>
-          <a:p>
-            <a:endParaRPr lang="en-US"/>
-          </a:p>
-        </p:txBody>
       </p:sp>
       <p:sp>
         <p:nvSpPr>
@@ -2475,13 +2488,6 @@
             <a:prstDash val="solid"/>
           </a:ln>
         </p:spPr>
-        <p:txBody>
-          <a:bodyPr/>
-          <a:lstStyle/>
-          <a:p>
-            <a:endParaRPr lang="en-US"/>
-          </a:p>
-        </p:txBody>
       </p:sp>
       <p:sp>
         <p:nvSpPr>
@@ -2507,13 +2513,6 @@
             <a:prstDash val="solid"/>
           </a:ln>
         </p:spPr>
-        <p:txBody>
-          <a:bodyPr/>
-          <a:lstStyle/>
-          <a:p>
-            <a:endParaRPr lang="en-US"/>
-          </a:p>
-        </p:txBody>
       </p:sp>
       <p:sp>
         <p:nvSpPr>
@@ -2541,13 +2540,6 @@
             <a:prstDash val="solid"/>
           </a:ln>
         </p:spPr>
-        <p:txBody>
-          <a:bodyPr/>
-          <a:lstStyle/>
-          <a:p>
-            <a:endParaRPr lang="en-US"/>
-          </a:p>
-        </p:txBody>
       </p:sp>
       <p:sp>
         <p:nvSpPr>
@@ -2573,13 +2565,6 @@
             <a:prstDash val="solid"/>
           </a:ln>
         </p:spPr>
-        <p:txBody>
-          <a:bodyPr/>
-          <a:lstStyle/>
-          <a:p>
-            <a:endParaRPr lang="en-US"/>
-          </a:p>
-        </p:txBody>
       </p:sp>
       <p:sp>
         <p:nvSpPr>
@@ -2607,13 +2592,6 @@
             <a:prstDash val="solid"/>
           </a:ln>
         </p:spPr>
-        <p:txBody>
-          <a:bodyPr/>
-          <a:lstStyle/>
-          <a:p>
-            <a:endParaRPr lang="en-US"/>
-          </a:p>
-        </p:txBody>
       </p:sp>
       <p:sp>
         <p:nvSpPr>
@@ -2639,13 +2617,6 @@
             <a:prstDash val="solid"/>
           </a:ln>
         </p:spPr>
-        <p:txBody>
-          <a:bodyPr/>
-          <a:lstStyle/>
-          <a:p>
-            <a:endParaRPr lang="en-US"/>
-          </a:p>
-        </p:txBody>
       </p:sp>
       <p:sp>
         <p:nvSpPr>
@@ -2673,13 +2644,6 @@
             <a:prstDash val="solid"/>
           </a:ln>
         </p:spPr>
-        <p:txBody>
-          <a:bodyPr/>
-          <a:lstStyle/>
-          <a:p>
-            <a:endParaRPr lang="en-US"/>
-          </a:p>
-        </p:txBody>
       </p:sp>
       <p:sp>
         <p:nvSpPr>
@@ -2705,13 +2669,6 @@
             <a:prstDash val="solid"/>
           </a:ln>
         </p:spPr>
-        <p:txBody>
-          <a:bodyPr/>
-          <a:lstStyle/>
-          <a:p>
-            <a:endParaRPr lang="en-US"/>
-          </a:p>
-        </p:txBody>
       </p:sp>
       <p:sp>
         <p:nvSpPr>
@@ -2739,13 +2696,6 @@
             <a:prstDash val="solid"/>
           </a:ln>
         </p:spPr>
-        <p:txBody>
-          <a:bodyPr/>
-          <a:lstStyle/>
-          <a:p>
-            <a:endParaRPr lang="en-US"/>
-          </a:p>
-        </p:txBody>
       </p:sp>
       <p:sp>
         <p:nvSpPr>
@@ -2771,13 +2721,6 @@
             <a:prstDash val="solid"/>
           </a:ln>
         </p:spPr>
-        <p:txBody>
-          <a:bodyPr/>
-          <a:lstStyle/>
-          <a:p>
-            <a:endParaRPr lang="en-US"/>
-          </a:p>
-        </p:txBody>
       </p:sp>
       <p:sp>
         <p:nvSpPr>
@@ -2803,13 +2746,6 @@
             <a:prstDash val="solid"/>
           </a:ln>
         </p:spPr>
-        <p:txBody>
-          <a:bodyPr/>
-          <a:lstStyle/>
-          <a:p>
-            <a:endParaRPr lang="en-US"/>
-          </a:p>
-        </p:txBody>
       </p:sp>
       <p:sp>
         <p:nvSpPr>
@@ -2837,13 +2773,6 @@
             <a:prstDash val="solid"/>
           </a:ln>
         </p:spPr>
-        <p:txBody>
-          <a:bodyPr/>
-          <a:lstStyle/>
-          <a:p>
-            <a:endParaRPr lang="en-US"/>
-          </a:p>
-        </p:txBody>
       </p:sp>
       <p:sp>
         <p:nvSpPr>
@@ -2869,13 +2798,6 @@
             <a:prstDash val="solid"/>
           </a:ln>
         </p:spPr>
-        <p:txBody>
-          <a:bodyPr/>
-          <a:lstStyle/>
-          <a:p>
-            <a:endParaRPr lang="en-US"/>
-          </a:p>
-        </p:txBody>
       </p:sp>
       <p:sp>
         <p:nvSpPr>
@@ -2903,13 +2825,6 @@
             <a:prstDash val="solid"/>
           </a:ln>
         </p:spPr>
-        <p:txBody>
-          <a:bodyPr/>
-          <a:lstStyle/>
-          <a:p>
-            <a:endParaRPr lang="en-US"/>
-          </a:p>
-        </p:txBody>
       </p:sp>
       <p:sp>
         <p:nvSpPr>
@@ -2935,13 +2850,6 @@
             <a:prstDash val="solid"/>
           </a:ln>
         </p:spPr>
-        <p:txBody>
-          <a:bodyPr/>
-          <a:lstStyle/>
-          <a:p>
-            <a:endParaRPr lang="en-US"/>
-          </a:p>
-        </p:txBody>
       </p:sp>
       <p:sp>
         <p:nvSpPr>
@@ -2969,13 +2877,6 @@
             <a:prstDash val="solid"/>
           </a:ln>
         </p:spPr>
-        <p:txBody>
-          <a:bodyPr/>
-          <a:lstStyle/>
-          <a:p>
-            <a:endParaRPr lang="en-US"/>
-          </a:p>
-        </p:txBody>
       </p:sp>
       <p:sp>
         <p:nvSpPr>
@@ -3001,13 +2902,6 @@
             <a:prstDash val="solid"/>
           </a:ln>
         </p:spPr>
-        <p:txBody>
-          <a:bodyPr/>
-          <a:lstStyle/>
-          <a:p>
-            <a:endParaRPr lang="en-US"/>
-          </a:p>
-        </p:txBody>
       </p:sp>
       <p:sp>
         <p:nvSpPr>
@@ -3035,13 +2929,6 @@
             <a:prstDash val="solid"/>
           </a:ln>
         </p:spPr>
-        <p:txBody>
-          <a:bodyPr/>
-          <a:lstStyle/>
-          <a:p>
-            <a:endParaRPr lang="en-US"/>
-          </a:p>
-        </p:txBody>
       </p:sp>
       <p:sp>
         <p:nvSpPr>
@@ -3067,13 +2954,6 @@
             <a:prstDash val="solid"/>
           </a:ln>
         </p:spPr>
-        <p:txBody>
-          <a:bodyPr/>
-          <a:lstStyle/>
-          <a:p>
-            <a:endParaRPr lang="en-US"/>
-          </a:p>
-        </p:txBody>
       </p:sp>
       <p:sp>
         <p:nvSpPr>
@@ -3101,13 +2981,6 @@
             <a:prstDash val="solid"/>
           </a:ln>
         </p:spPr>
-        <p:txBody>
-          <a:bodyPr/>
-          <a:lstStyle/>
-          <a:p>
-            <a:endParaRPr lang="en-US"/>
-          </a:p>
-        </p:txBody>
       </p:sp>
       <p:sp>
         <p:nvSpPr>
@@ -3133,13 +3006,6 @@
             <a:prstDash val="solid"/>
           </a:ln>
         </p:spPr>
-        <p:txBody>
-          <a:bodyPr/>
-          <a:lstStyle/>
-          <a:p>
-            <a:endParaRPr lang="en-US"/>
-          </a:p>
-        </p:txBody>
       </p:sp>
       <p:sp>
         <p:nvSpPr>
@@ -3167,13 +3033,6 @@
             <a:prstDash val="solid"/>
           </a:ln>
         </p:spPr>
-        <p:txBody>
-          <a:bodyPr/>
-          <a:lstStyle/>
-          <a:p>
-            <a:endParaRPr lang="en-US"/>
-          </a:p>
-        </p:txBody>
       </p:sp>
       <p:sp>
         <p:nvSpPr>
@@ -3199,13 +3058,6 @@
             <a:prstDash val="solid"/>
           </a:ln>
         </p:spPr>
-        <p:txBody>
-          <a:bodyPr/>
-          <a:lstStyle/>
-          <a:p>
-            <a:endParaRPr lang="en-US"/>
-          </a:p>
-        </p:txBody>
       </p:sp>
       <p:sp>
         <p:nvSpPr>
@@ -3231,13 +3083,6 @@
             <a:prstDash val="solid"/>
           </a:ln>
         </p:spPr>
-        <p:txBody>
-          <a:bodyPr/>
-          <a:lstStyle/>
-          <a:p>
-            <a:endParaRPr lang="en-US"/>
-          </a:p>
-        </p:txBody>
       </p:sp>
       <p:sp>
         <p:nvSpPr>
@@ -3265,13 +3110,6 @@
             <a:prstDash val="solid"/>
           </a:ln>
         </p:spPr>
-        <p:txBody>
-          <a:bodyPr/>
-          <a:lstStyle/>
-          <a:p>
-            <a:endParaRPr lang="en-US"/>
-          </a:p>
-        </p:txBody>
       </p:sp>
       <p:sp>
         <p:nvSpPr>
@@ -3297,13 +3135,6 @@
             <a:prstDash val="solid"/>
           </a:ln>
         </p:spPr>
-        <p:txBody>
-          <a:bodyPr/>
-          <a:lstStyle/>
-          <a:p>
-            <a:endParaRPr lang="en-US"/>
-          </a:p>
-        </p:txBody>
       </p:sp>
       <p:sp>
         <p:nvSpPr>
@@ -3329,13 +3160,6 @@
             <a:prstDash val="solid"/>
           </a:ln>
         </p:spPr>
-        <p:txBody>
-          <a:bodyPr/>
-          <a:lstStyle/>
-          <a:p>
-            <a:endParaRPr lang="en-US"/>
-          </a:p>
-        </p:txBody>
       </p:sp>
       <p:sp>
         <p:nvSpPr>
@@ -3358,7 +3182,7 @@
           <a:bodyPr wrap="square" lIns="0" tIns="0" rIns="0" bIns="0" rtlCol="0" anchor="ctr"/>
           <a:lstStyle/>
           <a:p>
-            <a:pPr marL="0" indent="0">
+            <a:pPr indent="0" marL="0">
               <a:buNone/>
             </a:pPr>
             <a:r>
@@ -3400,13 +3224,6 @@
             <a:prstDash val="solid"/>
           </a:ln>
         </p:spPr>
-        <p:txBody>
-          <a:bodyPr/>
-          <a:lstStyle/>
-          <a:p>
-            <a:endParaRPr lang="en-US"/>
-          </a:p>
-        </p:txBody>
       </p:sp>
       <p:sp>
         <p:nvSpPr>
@@ -3429,7 +3246,7 @@
           <a:bodyPr wrap="square" lIns="0" tIns="0" rIns="0" bIns="0" rtlCol="0" anchor="ctr"/>
           <a:lstStyle/>
           <a:p>
-            <a:pPr marL="0" indent="0">
+            <a:pPr indent="0" marL="0">
               <a:buNone/>
             </a:pPr>
             <a:r>
@@ -3471,13 +3288,6 @@
             <a:prstDash val="solid"/>
           </a:ln>
         </p:spPr>
-        <p:txBody>
-          <a:bodyPr/>
-          <a:lstStyle/>
-          <a:p>
-            <a:endParaRPr lang="en-US"/>
-          </a:p>
-        </p:txBody>
       </p:sp>
       <p:sp>
         <p:nvSpPr>
@@ -3500,11 +3310,11 @@
           <a:bodyPr wrap="square" lIns="0" tIns="0" rIns="0" bIns="0" rtlCol="0" anchor="ctr"/>
           <a:lstStyle/>
           <a:p>
-            <a:pPr marL="0" indent="0" algn="l">
+            <a:pPr algn="l" indent="0" marL="0">
               <a:buNone/>
             </a:pPr>
             <a:r>
-              <a:rPr lang="en-US" sz="4000" b="1" kern="0" spc="100" dirty="0">
+              <a:rPr lang="en-US" sz="4000" b="1" spc="100" kern="0" dirty="0">
                 <a:solidFill>
                   <a:srgbClr val="FFFFFF"/>
                 </a:solidFill>
@@ -3517,11 +3327,11 @@
             <a:endParaRPr lang="en-US" sz="4000" dirty="0"/>
           </a:p>
           <a:p>
-            <a:pPr marL="0" indent="0" algn="l">
+            <a:pPr algn="l" indent="0" marL="0">
               <a:buNone/>
             </a:pPr>
             <a:r>
-              <a:rPr lang="en-US" sz="4000" b="1" kern="0" spc="100" dirty="0">
+              <a:rPr lang="en-US" sz="4000" b="1" spc="100" kern="0" dirty="0">
                 <a:solidFill>
                   <a:srgbClr val="FFFFFF"/>
                 </a:solidFill>
@@ -3556,7 +3366,7 @@
           <a:bodyPr wrap="square" lIns="0" tIns="0" rIns="0" bIns="0" rtlCol="0" anchor="ctr"/>
           <a:lstStyle/>
           <a:p>
-            <a:pPr marL="0" indent="0" algn="l">
+            <a:pPr algn="l" indent="0" marL="0">
               <a:buNone/>
             </a:pPr>
             <a:r>
@@ -3595,7 +3405,7 @@
           <a:bodyPr wrap="square" lIns="0" tIns="0" rIns="0" bIns="0" rtlCol="0" anchor="ctr"/>
           <a:lstStyle/>
           <a:p>
-            <a:pPr marL="0" indent="0" algn="l">
+            <a:pPr algn="l" indent="0" marL="0">
               <a:buNone/>
             </a:pPr>
             <a:r>
@@ -3629,7 +3439,6 @@
         <a:solidFill>
           <a:srgbClr val="EFF6FF"/>
         </a:solidFill>
-        <a:effectLst/>
       </p:bgPr>
     </p:bg>
     <p:spTree>
@@ -3670,13 +3479,6 @@
             <a:prstDash val="solid"/>
           </a:ln>
         </p:spPr>
-        <p:txBody>
-          <a:bodyPr/>
-          <a:lstStyle/>
-          <a:p>
-            <a:endParaRPr lang="en-US"/>
-          </a:p>
-        </p:txBody>
       </p:sp>
       <p:sp>
         <p:nvSpPr>
@@ -3699,7 +3501,7 @@
           <a:bodyPr wrap="square" lIns="0" tIns="0" rIns="0" bIns="0" rtlCol="0" anchor="ctr"/>
           <a:lstStyle/>
           <a:p>
-            <a:pPr marL="0" indent="0" algn="l">
+            <a:pPr algn="l" indent="0" marL="0">
               <a:buNone/>
             </a:pPr>
             <a:r>
@@ -3738,7 +3540,7 @@
           <a:bodyPr wrap="square" lIns="0" tIns="0" rIns="0" bIns="0" rtlCol="0" anchor="ctr"/>
           <a:lstStyle/>
           <a:p>
-            <a:pPr marL="0" indent="0" algn="l">
+            <a:pPr algn="l" indent="0" marL="0">
               <a:buNone/>
             </a:pPr>
             <a:r>
@@ -3777,7 +3579,7 @@
           <a:bodyPr wrap="square" lIns="0" tIns="0" rIns="0" bIns="0" rtlCol="0" anchor="b"/>
           <a:lstStyle/>
           <a:p>
-            <a:pPr marL="0" indent="0" algn="l">
+            <a:pPr algn="l" indent="0" marL="0">
               <a:buNone/>
             </a:pPr>
             <a:r>
@@ -3816,7 +3618,7 @@
           <a:bodyPr wrap="square" lIns="0" tIns="0" rIns="0" bIns="0" rtlCol="0" anchor="ctr"/>
           <a:lstStyle/>
           <a:p>
-            <a:pPr marL="0" indent="0" algn="l">
+            <a:pPr algn="l" indent="0" marL="0">
               <a:buNone/>
             </a:pPr>
             <a:r>
@@ -3855,7 +3657,7 @@
           <a:bodyPr wrap="square" lIns="0" tIns="0" rIns="0" bIns="0" rtlCol="0" anchor="ctr"/>
           <a:lstStyle/>
           <a:p>
-            <a:pPr marL="0" indent="0" algn="l">
+            <a:pPr algn="l" indent="0" marL="0">
               <a:buNone/>
             </a:pPr>
             <a:r>
@@ -3894,7 +3696,7 @@
           <a:bodyPr wrap="square" lIns="0" tIns="0" rIns="0" bIns="0" rtlCol="0" anchor="ctr"/>
           <a:lstStyle/>
           <a:p>
-            <a:pPr marL="0" indent="0" algn="l">
+            <a:pPr algn="l" indent="0" marL="0">
               <a:buNone/>
             </a:pPr>
             <a:r>
@@ -3936,13 +3738,6 @@
             <a:prstDash val="solid"/>
           </a:ln>
         </p:spPr>
-        <p:txBody>
-          <a:bodyPr/>
-          <a:lstStyle/>
-          <a:p>
-            <a:endParaRPr lang="en-US"/>
-          </a:p>
-        </p:txBody>
       </p:sp>
       <p:sp>
         <p:nvSpPr>
@@ -3968,20 +3763,13 @@
             <a:prstDash val="solid"/>
           </a:ln>
           <a:effectLst>
-            <a:outerShdw blurRad="76200" dist="38100" dir="8100000" algn="bl" rotWithShape="0">
+            <a:outerShdw sx="100000" sy="100000" kx="0" ky="0" algn="bl" rotWithShape="0" blurRad="76200" dist="38100" dir="8100000">
               <a:srgbClr val="000000">
                 <a:alpha val="10000"/>
               </a:srgbClr>
             </a:outerShdw>
           </a:effectLst>
         </p:spPr>
-        <p:txBody>
-          <a:bodyPr/>
-          <a:lstStyle/>
-          <a:p>
-            <a:endParaRPr lang="en-US"/>
-          </a:p>
-        </p:txBody>
       </p:sp>
       <p:sp>
         <p:nvSpPr>
@@ -4007,13 +3795,6 @@
             <a:prstDash val="solid"/>
           </a:ln>
         </p:spPr>
-        <p:txBody>
-          <a:bodyPr/>
-          <a:lstStyle/>
-          <a:p>
-            <a:endParaRPr lang="en-US"/>
-          </a:p>
-        </p:txBody>
       </p:sp>
       <p:sp>
         <p:nvSpPr>
@@ -4036,7 +3817,7 @@
           <a:bodyPr wrap="square" lIns="0" tIns="0" rIns="0" bIns="0" rtlCol="0" anchor="ctr"/>
           <a:lstStyle/>
           <a:p>
-            <a:pPr marL="0" indent="0" algn="l">
+            <a:pPr algn="l" indent="0" marL="0">
               <a:buNone/>
             </a:pPr>
             <a:r>
@@ -4075,7 +3856,7 @@
           <a:bodyPr wrap="square" lIns="0" tIns="0" rIns="0" bIns="0" rtlCol="0" anchor="ctr"/>
           <a:lstStyle/>
           <a:p>
-            <a:pPr marL="0" indent="0" algn="l">
+            <a:pPr algn="l" indent="0" marL="0">
               <a:buNone/>
             </a:pPr>
             <a:r>
@@ -4114,7 +3895,7 @@
           <a:bodyPr wrap="square" lIns="0" tIns="0" rIns="0" bIns="0" rtlCol="0" anchor="ctr"/>
           <a:lstStyle/>
           <a:p>
-            <a:pPr marL="0" indent="0" algn="l">
+            <a:pPr algn="l" indent="0" marL="0">
               <a:buNone/>
             </a:pPr>
             <a:r>
@@ -4156,20 +3937,13 @@
             <a:prstDash val="solid"/>
           </a:ln>
           <a:effectLst>
-            <a:outerShdw blurRad="76200" dist="38100" dir="8100000" algn="bl" rotWithShape="0">
+            <a:outerShdw sx="100000" sy="100000" kx="0" ky="0" algn="bl" rotWithShape="0" blurRad="76200" dist="38100" dir="8100000">
               <a:srgbClr val="000000">
                 <a:alpha val="10000"/>
               </a:srgbClr>
             </a:outerShdw>
           </a:effectLst>
         </p:spPr>
-        <p:txBody>
-          <a:bodyPr/>
-          <a:lstStyle/>
-          <a:p>
-            <a:endParaRPr lang="en-US"/>
-          </a:p>
-        </p:txBody>
       </p:sp>
       <p:sp>
         <p:nvSpPr>
@@ -4195,13 +3969,6 @@
             <a:prstDash val="solid"/>
           </a:ln>
         </p:spPr>
-        <p:txBody>
-          <a:bodyPr/>
-          <a:lstStyle/>
-          <a:p>
-            <a:endParaRPr lang="en-US"/>
-          </a:p>
-        </p:txBody>
       </p:sp>
       <p:sp>
         <p:nvSpPr>
@@ -4224,7 +3991,7 @@
           <a:bodyPr wrap="square" lIns="0" tIns="0" rIns="0" bIns="0" rtlCol="0" anchor="ctr"/>
           <a:lstStyle/>
           <a:p>
-            <a:pPr marL="0" indent="0" algn="l">
+            <a:pPr algn="l" indent="0" marL="0">
               <a:buNone/>
             </a:pPr>
             <a:r>
@@ -4263,7 +4030,7 @@
           <a:bodyPr wrap="square" lIns="0" tIns="0" rIns="0" bIns="0" rtlCol="0" anchor="ctr"/>
           <a:lstStyle/>
           <a:p>
-            <a:pPr marL="0" indent="0" algn="l">
+            <a:pPr algn="l" indent="0" marL="0">
               <a:buNone/>
             </a:pPr>
             <a:r>
@@ -4302,7 +4069,7 @@
           <a:bodyPr wrap="square" lIns="0" tIns="0" rIns="0" bIns="0" rtlCol="0" anchor="ctr"/>
           <a:lstStyle/>
           <a:p>
-            <a:pPr marL="0" indent="0" algn="l">
+            <a:pPr algn="l" indent="0" marL="0">
               <a:buNone/>
             </a:pPr>
             <a:r>
@@ -4336,7 +4103,6 @@
         <a:solidFill>
           <a:srgbClr val="EFF6FF"/>
         </a:solidFill>
-        <a:effectLst/>
       </p:bgPr>
     </p:bg>
     <p:spTree>
@@ -4377,13 +4143,6 @@
             <a:prstDash val="solid"/>
           </a:ln>
         </p:spPr>
-        <p:txBody>
-          <a:bodyPr/>
-          <a:lstStyle/>
-          <a:p>
-            <a:endParaRPr lang="en-US"/>
-          </a:p>
-        </p:txBody>
       </p:sp>
       <p:sp>
         <p:nvSpPr>
@@ -4406,7 +4165,7 @@
           <a:bodyPr wrap="square" lIns="0" tIns="0" rIns="0" bIns="0" rtlCol="0" anchor="ctr"/>
           <a:lstStyle/>
           <a:p>
-            <a:pPr marL="0" indent="0" algn="l">
+            <a:pPr algn="l" indent="0" marL="0">
               <a:buNone/>
             </a:pPr>
             <a:r>
@@ -4445,7 +4204,7 @@
           <a:bodyPr wrap="square" lIns="0" tIns="0" rIns="0" bIns="0" rtlCol="0" anchor="ctr"/>
           <a:lstStyle/>
           <a:p>
-            <a:pPr marL="0" indent="0" algn="l">
+            <a:pPr algn="l" indent="0" marL="0">
               <a:buNone/>
             </a:pPr>
             <a:r>
@@ -4487,20 +4246,13 @@
             <a:prstDash val="solid"/>
           </a:ln>
           <a:effectLst>
-            <a:outerShdw blurRad="76200" dist="38100" dir="8100000" algn="bl" rotWithShape="0">
+            <a:outerShdw sx="100000" sy="100000" kx="0" ky="0" algn="bl" rotWithShape="0" blurRad="76200" dist="38100" dir="8100000">
               <a:srgbClr val="000000">
                 <a:alpha val="10000"/>
               </a:srgbClr>
             </a:outerShdw>
           </a:effectLst>
         </p:spPr>
-        <p:txBody>
-          <a:bodyPr/>
-          <a:lstStyle/>
-          <a:p>
-            <a:endParaRPr lang="en-US"/>
-          </a:p>
-        </p:txBody>
       </p:sp>
       <p:sp>
         <p:nvSpPr>
@@ -4523,7 +4275,7 @@
           <a:bodyPr wrap="square" lIns="0" tIns="0" rIns="0" bIns="0" rtlCol="0" anchor="ctr"/>
           <a:lstStyle/>
           <a:p>
-            <a:pPr marL="0" indent="0" algn="ctr">
+            <a:pPr algn="ctr" indent="0" marL="0">
               <a:buNone/>
             </a:pPr>
             <a:r>
@@ -4562,7 +4314,7 @@
           <a:bodyPr wrap="square" rtlCol="0" anchor="t"/>
           <a:lstStyle/>
           <a:p>
-            <a:pPr marL="0" indent="0" algn="ctr">
+            <a:pPr algn="ctr" indent="0" marL="0">
               <a:buNone/>
             </a:pPr>
             <a:r>
@@ -4579,7 +4331,7 @@
             <a:endParaRPr lang="en-US" sz="1100" dirty="0"/>
           </a:p>
           <a:p>
-            <a:pPr marL="0" indent="0" algn="ctr">
+            <a:pPr algn="ctr" indent="0" marL="0">
               <a:buNone/>
             </a:pPr>
             <a:r>
@@ -4621,13 +4373,6 @@
             <a:prstDash val="solid"/>
           </a:ln>
         </p:spPr>
-        <p:txBody>
-          <a:bodyPr/>
-          <a:lstStyle/>
-          <a:p>
-            <a:endParaRPr lang="en-US"/>
-          </a:p>
-        </p:txBody>
       </p:sp>
       <p:sp>
         <p:nvSpPr>
@@ -4653,20 +4398,13 @@
             <a:prstDash val="solid"/>
           </a:ln>
           <a:effectLst>
-            <a:outerShdw blurRad="76200" dist="38100" dir="8100000" algn="bl" rotWithShape="0">
+            <a:outerShdw sx="100000" sy="100000" kx="0" ky="0" algn="bl" rotWithShape="0" blurRad="76200" dist="38100" dir="8100000">
               <a:srgbClr val="000000">
                 <a:alpha val="10000"/>
               </a:srgbClr>
             </a:outerShdw>
           </a:effectLst>
         </p:spPr>
-        <p:txBody>
-          <a:bodyPr/>
-          <a:lstStyle/>
-          <a:p>
-            <a:endParaRPr lang="en-US"/>
-          </a:p>
-        </p:txBody>
       </p:sp>
       <p:sp>
         <p:nvSpPr>
@@ -4689,7 +4427,7 @@
           <a:bodyPr wrap="square" lIns="0" tIns="0" rIns="0" bIns="0" rtlCol="0" anchor="ctr"/>
           <a:lstStyle/>
           <a:p>
-            <a:pPr marL="0" indent="0" algn="ctr">
+            <a:pPr algn="ctr" indent="0" marL="0">
               <a:buNone/>
             </a:pPr>
             <a:r>
@@ -4728,7 +4466,7 @@
           <a:bodyPr wrap="square" rtlCol="0" anchor="t"/>
           <a:lstStyle/>
           <a:p>
-            <a:pPr marL="0" indent="0" algn="ctr">
+            <a:pPr algn="ctr" indent="0" marL="0">
               <a:buNone/>
             </a:pPr>
             <a:r>
@@ -4745,7 +4483,7 @@
             <a:endParaRPr lang="en-US" sz="1100" dirty="0"/>
           </a:p>
           <a:p>
-            <a:pPr marL="0" indent="0" algn="ctr">
+            <a:pPr algn="ctr" indent="0" marL="0">
               <a:buNone/>
             </a:pPr>
             <a:r>
@@ -4787,13 +4525,6 @@
             <a:prstDash val="solid"/>
           </a:ln>
         </p:spPr>
-        <p:txBody>
-          <a:bodyPr/>
-          <a:lstStyle/>
-          <a:p>
-            <a:endParaRPr lang="en-US"/>
-          </a:p>
-        </p:txBody>
       </p:sp>
       <p:sp>
         <p:nvSpPr>
@@ -4819,20 +4550,13 @@
             <a:prstDash val="solid"/>
           </a:ln>
           <a:effectLst>
-            <a:outerShdw blurRad="76200" dist="38100" dir="8100000" algn="bl" rotWithShape="0">
+            <a:outerShdw sx="100000" sy="100000" kx="0" ky="0" algn="bl" rotWithShape="0" blurRad="76200" dist="38100" dir="8100000">
               <a:srgbClr val="000000">
                 <a:alpha val="10000"/>
               </a:srgbClr>
             </a:outerShdw>
           </a:effectLst>
         </p:spPr>
-        <p:txBody>
-          <a:bodyPr/>
-          <a:lstStyle/>
-          <a:p>
-            <a:endParaRPr lang="en-US"/>
-          </a:p>
-        </p:txBody>
       </p:sp>
       <p:sp>
         <p:nvSpPr>
@@ -4855,7 +4579,7 @@
           <a:bodyPr wrap="square" lIns="0" tIns="0" rIns="0" bIns="0" rtlCol="0" anchor="ctr"/>
           <a:lstStyle/>
           <a:p>
-            <a:pPr marL="0" indent="0" algn="ctr">
+            <a:pPr algn="ctr" indent="0" marL="0">
               <a:buNone/>
             </a:pPr>
             <a:r>
@@ -4894,7 +4618,7 @@
           <a:bodyPr wrap="square" rtlCol="0" anchor="t"/>
           <a:lstStyle/>
           <a:p>
-            <a:pPr marL="0" indent="0" algn="ctr">
+            <a:pPr algn="ctr" indent="0" marL="0">
               <a:buNone/>
             </a:pPr>
             <a:r>
@@ -4911,7 +4635,7 @@
             <a:endParaRPr lang="en-US" sz="1100" dirty="0"/>
           </a:p>
           <a:p>
-            <a:pPr marL="0" indent="0" algn="ctr">
+            <a:pPr algn="ctr" indent="0" marL="0">
               <a:buNone/>
             </a:pPr>
             <a:r>
@@ -4953,13 +4677,6 @@
             <a:prstDash val="solid"/>
           </a:ln>
         </p:spPr>
-        <p:txBody>
-          <a:bodyPr/>
-          <a:lstStyle/>
-          <a:p>
-            <a:endParaRPr lang="en-US"/>
-          </a:p>
-        </p:txBody>
       </p:sp>
       <p:sp>
         <p:nvSpPr>
@@ -4985,20 +4702,13 @@
             <a:prstDash val="solid"/>
           </a:ln>
           <a:effectLst>
-            <a:outerShdw blurRad="76200" dist="38100" dir="8100000" algn="bl" rotWithShape="0">
+            <a:outerShdw sx="100000" sy="100000" kx="0" ky="0" algn="bl" rotWithShape="0" blurRad="76200" dist="38100" dir="8100000">
               <a:srgbClr val="000000">
                 <a:alpha val="10000"/>
               </a:srgbClr>
             </a:outerShdw>
           </a:effectLst>
         </p:spPr>
-        <p:txBody>
-          <a:bodyPr/>
-          <a:lstStyle/>
-          <a:p>
-            <a:endParaRPr lang="en-US"/>
-          </a:p>
-        </p:txBody>
       </p:sp>
       <p:sp>
         <p:nvSpPr>
@@ -5021,7 +4731,7 @@
           <a:bodyPr wrap="square" lIns="0" tIns="0" rIns="0" bIns="0" rtlCol="0" anchor="ctr"/>
           <a:lstStyle/>
           <a:p>
-            <a:pPr marL="0" indent="0" algn="ctr">
+            <a:pPr algn="ctr" indent="0" marL="0">
               <a:buNone/>
             </a:pPr>
             <a:r>
@@ -5060,7 +4770,7 @@
           <a:bodyPr wrap="square" rtlCol="0" anchor="t"/>
           <a:lstStyle/>
           <a:p>
-            <a:pPr marL="0" indent="0" algn="ctr">
+            <a:pPr algn="ctr" indent="0" marL="0">
               <a:buNone/>
             </a:pPr>
             <a:r>
@@ -5077,7 +4787,7 @@
             <a:endParaRPr lang="en-US" sz="1100" dirty="0"/>
           </a:p>
           <a:p>
-            <a:pPr marL="0" indent="0" algn="ctr">
+            <a:pPr algn="ctr" indent="0" marL="0">
               <a:buNone/>
             </a:pPr>
             <a:r>
@@ -5119,20 +4829,13 @@
             <a:prstDash val="solid"/>
           </a:ln>
           <a:effectLst>
-            <a:outerShdw blurRad="76200" dist="38100" dir="8100000" algn="bl" rotWithShape="0">
+            <a:outerShdw sx="100000" sy="100000" kx="0" ky="0" algn="bl" rotWithShape="0" blurRad="76200" dist="38100" dir="8100000">
               <a:srgbClr val="000000">
                 <a:alpha val="10000"/>
               </a:srgbClr>
             </a:outerShdw>
           </a:effectLst>
         </p:spPr>
-        <p:txBody>
-          <a:bodyPr/>
-          <a:lstStyle/>
-          <a:p>
-            <a:endParaRPr lang="en-US"/>
-          </a:p>
-        </p:txBody>
       </p:sp>
       <p:sp>
         <p:nvSpPr>
@@ -5158,13 +4861,6 @@
             <a:prstDash val="solid"/>
           </a:ln>
         </p:spPr>
-        <p:txBody>
-          <a:bodyPr/>
-          <a:lstStyle/>
-          <a:p>
-            <a:endParaRPr lang="en-US"/>
-          </a:p>
-        </p:txBody>
       </p:sp>
       <p:sp>
         <p:nvSpPr>
@@ -5187,7 +4883,7 @@
           <a:bodyPr wrap="square" rtlCol="0" anchor="t"/>
           <a:lstStyle/>
           <a:p>
-            <a:pPr marL="0" indent="0" algn="l">
+            <a:pPr algn="l" indent="0" marL="0">
               <a:buNone/>
             </a:pPr>
             <a:r>
@@ -5204,7 +4900,7 @@
             <a:endParaRPr lang="en-US" sz="1100" dirty="0"/>
           </a:p>
           <a:p>
-            <a:pPr marL="0" indent="0" algn="l">
+            <a:pPr algn="l" indent="0" marL="0">
               <a:buNone/>
             </a:pPr>
             <a:r>
@@ -5221,7 +4917,7 @@
             <a:endParaRPr lang="en-US" sz="1100" dirty="0"/>
           </a:p>
           <a:p>
-            <a:pPr marL="0" indent="0" algn="l">
+            <a:pPr algn="l" indent="0" marL="0">
               <a:buNone/>
             </a:pPr>
             <a:r>
@@ -5235,6 +4931,9 @@
               </a:rPr>
               <a:t>Shumailov et al. — </a:t>
             </a:r>
+            <a:pPr algn="l" indent="0" marL="0">
+              <a:buNone/>
+            </a:pPr>
             <a:r>
               <a:rPr lang="en-US" sz="1100" i="1" dirty="0">
                 <a:solidFill>
@@ -5246,6 +4945,9 @@
               </a:rPr>
               <a:t>"AI models collapse when trained on recursively generated data"</a:t>
             </a:r>
+            <a:pPr algn="l" indent="0" marL="0">
+              <a:buNone/>
+            </a:pPr>
             <a:r>
               <a:rPr lang="en-US" sz="1100" dirty="0">
                 <a:solidFill>
@@ -5277,7 +4979,6 @@
         <a:solidFill>
           <a:srgbClr val="0F172A"/>
         </a:solidFill>
-        <a:effectLst/>
       </p:bgPr>
     </p:bg>
     <p:spTree>
@@ -5318,13 +5019,6 @@
             <a:prstDash val="solid"/>
           </a:ln>
         </p:spPr>
-        <p:txBody>
-          <a:bodyPr/>
-          <a:lstStyle/>
-          <a:p>
-            <a:endParaRPr lang="en-US"/>
-          </a:p>
-        </p:txBody>
       </p:sp>
       <p:sp>
         <p:nvSpPr>
@@ -5347,7 +5041,7 @@
           <a:bodyPr wrap="square" lIns="0" tIns="0" rIns="0" bIns="0" rtlCol="0" anchor="ctr"/>
           <a:lstStyle/>
           <a:p>
-            <a:pPr marL="0" indent="0" algn="l">
+            <a:pPr algn="l" indent="0" marL="0">
               <a:buNone/>
             </a:pPr>
             <a:r>
@@ -5359,7 +5053,7 @@
                 <a:ea typeface="Arial Black" pitchFamily="34" charset="-122"/>
                 <a:cs typeface="Arial Black" pitchFamily="34" charset="-120"/>
               </a:rPr>
-              <a:t>Why Should We Care</a:t>
+              <a:t>Why Pentesters Should Care</a:t>
             </a:r>
             <a:endParaRPr lang="en-US" sz="3000" dirty="0"/>
           </a:p>
@@ -5389,13 +5083,6 @@
             <a:prstDash val="solid"/>
           </a:ln>
         </p:spPr>
-        <p:txBody>
-          <a:bodyPr/>
-          <a:lstStyle/>
-          <a:p>
-            <a:endParaRPr lang="en-US" dirty="0"/>
-          </a:p>
-        </p:txBody>
       </p:sp>
       <p:sp>
         <p:nvSpPr>
@@ -5421,13 +5108,6 @@
             <a:prstDash val="solid"/>
           </a:ln>
         </p:spPr>
-        <p:txBody>
-          <a:bodyPr/>
-          <a:lstStyle/>
-          <a:p>
-            <a:endParaRPr lang="en-US"/>
-          </a:p>
-        </p:txBody>
       </p:sp>
       <p:sp>
         <p:nvSpPr>
@@ -5450,7 +5130,7 @@
           <a:bodyPr wrap="square" lIns="0" tIns="0" rIns="0" bIns="0" rtlCol="0" anchor="ctr"/>
           <a:lstStyle/>
           <a:p>
-            <a:pPr marL="0" indent="0" algn="l">
+            <a:pPr algn="l" indent="0" marL="0">
               <a:buNone/>
             </a:pPr>
             <a:r>
@@ -5489,7 +5169,7 @@
           <a:bodyPr wrap="square" rtlCol="0" anchor="t"/>
           <a:lstStyle/>
           <a:p>
-            <a:pPr marL="0" indent="0" algn="l">
+            <a:pPr algn="l" indent="0" marL="0">
               <a:buNone/>
             </a:pPr>
             <a:r>
@@ -5501,8 +5181,9 @@
                 <a:ea typeface="Calibri" pitchFamily="34" charset="-122"/>
                 <a:cs typeface="Calibri" pitchFamily="34" charset="-120"/>
               </a:rPr>
-              <a:t>Your target profile is built on web data. If half of it is synthetic — fake LinkedIn employees, AI-generated reviews, bot forum posts — your attack surface map is fiction. </a:t>
-            </a:r>
+              <a:t>Your target profile is built on web data. If half of it is synthetic — fake LinkedIn employees, AI-generated reviews, bot forum posts — your attack surface map is fiction.</a:t>
+            </a:r>
+            <a:endParaRPr lang="en-US" sz="1200" dirty="0"/>
           </a:p>
         </p:txBody>
       </p:sp>
@@ -5527,7 +5208,7 @@
           <a:bodyPr wrap="square" lIns="0" tIns="0" rIns="0" bIns="0" rtlCol="0" anchor="ctr"/>
           <a:lstStyle/>
           <a:p>
-            <a:pPr marL="0" indent="0" algn="l">
+            <a:pPr algn="l" indent="0" marL="0">
               <a:buNone/>
             </a:pPr>
             <a:r>
@@ -5569,13 +5250,6 @@
             <a:prstDash val="solid"/>
           </a:ln>
         </p:spPr>
-        <p:txBody>
-          <a:bodyPr/>
-          <a:lstStyle/>
-          <a:p>
-            <a:endParaRPr lang="en-US"/>
-          </a:p>
-        </p:txBody>
       </p:sp>
       <p:sp>
         <p:nvSpPr>
@@ -5601,13 +5275,6 @@
             <a:prstDash val="solid"/>
           </a:ln>
         </p:spPr>
-        <p:txBody>
-          <a:bodyPr/>
-          <a:lstStyle/>
-          <a:p>
-            <a:endParaRPr lang="en-US"/>
-          </a:p>
-        </p:txBody>
       </p:sp>
       <p:sp>
         <p:nvSpPr>
@@ -5630,7 +5297,7 @@
           <a:bodyPr wrap="square" lIns="0" tIns="0" rIns="0" bIns="0" rtlCol="0" anchor="ctr"/>
           <a:lstStyle/>
           <a:p>
-            <a:pPr marL="0" indent="0" algn="l">
+            <a:pPr algn="l" indent="0" marL="0">
               <a:buNone/>
             </a:pPr>
             <a:r>
@@ -5669,7 +5336,7 @@
           <a:bodyPr wrap="square" rtlCol="0" anchor="t"/>
           <a:lstStyle/>
           <a:p>
-            <a:pPr marL="0" indent="0" algn="l">
+            <a:pPr algn="l" indent="0" marL="0">
               <a:buNone/>
             </a:pPr>
             <a:r>
@@ -5708,7 +5375,7 @@
           <a:bodyPr wrap="square" lIns="0" tIns="0" rIns="0" bIns="0" rtlCol="0" anchor="ctr"/>
           <a:lstStyle/>
           <a:p>
-            <a:pPr marL="0" indent="0" algn="l">
+            <a:pPr algn="l" indent="0" marL="0">
               <a:buNone/>
             </a:pPr>
             <a:r>
@@ -5750,13 +5417,6 @@
             <a:prstDash val="solid"/>
           </a:ln>
         </p:spPr>
-        <p:txBody>
-          <a:bodyPr/>
-          <a:lstStyle/>
-          <a:p>
-            <a:endParaRPr lang="en-US"/>
-          </a:p>
-        </p:txBody>
       </p:sp>
       <p:sp>
         <p:nvSpPr>
@@ -5782,13 +5442,6 @@
             <a:prstDash val="solid"/>
           </a:ln>
         </p:spPr>
-        <p:txBody>
-          <a:bodyPr/>
-          <a:lstStyle/>
-          <a:p>
-            <a:endParaRPr lang="en-US"/>
-          </a:p>
-        </p:txBody>
       </p:sp>
       <p:sp>
         <p:nvSpPr>
@@ -5811,7 +5464,7 @@
           <a:bodyPr wrap="square" lIns="0" tIns="0" rIns="0" bIns="0" rtlCol="0" anchor="ctr"/>
           <a:lstStyle/>
           <a:p>
-            <a:pPr marL="0" indent="0" algn="l">
+            <a:pPr algn="l" indent="0" marL="0">
               <a:buNone/>
             </a:pPr>
             <a:r>
@@ -5850,7 +5503,7 @@
           <a:bodyPr wrap="square" rtlCol="0" anchor="t"/>
           <a:lstStyle/>
           <a:p>
-            <a:pPr marL="0" indent="0" algn="l">
+            <a:pPr algn="l" indent="0" marL="0">
               <a:buNone/>
             </a:pPr>
             <a:r>
@@ -5889,7 +5542,7 @@
           <a:bodyPr wrap="square" lIns="0" tIns="0" rIns="0" bIns="0" rtlCol="0" anchor="ctr"/>
           <a:lstStyle/>
           <a:p>
-            <a:pPr marL="0" indent="0" algn="l">
+            <a:pPr algn="l" indent="0" marL="0">
               <a:buNone/>
             </a:pPr>
             <a:r>
@@ -5917,43 +5570,12 @@
 
 <file path=ppt/slides/slide5.xml><?xml version="1.0" encoding="utf-8"?>
 <p:sld xmlns:a="http://schemas.openxmlformats.org/drawingml/2006/main" xmlns:r="http://schemas.openxmlformats.org/officeDocument/2006/relationships" xmlns:p="http://schemas.openxmlformats.org/presentationml/2006/main">
-  <p:cSld>
-    <p:spTree>
-      <p:nvGrpSpPr>
-        <p:cNvPr id="1" name=""/>
-        <p:cNvGrpSpPr/>
-        <p:nvPr/>
-      </p:nvGrpSpPr>
-      <p:grpSpPr>
-        <a:xfrm>
-          <a:off x="0" y="0"/>
-          <a:ext cx="0" cy="0"/>
-          <a:chOff x="0" y="0"/>
-          <a:chExt cx="0" cy="0"/>
-        </a:xfrm>
-      </p:grpSpPr>
-    </p:spTree>
-    <p:extLst>
-      <p:ext uri="{BB962C8B-B14F-4D97-AF65-F5344CB8AC3E}">
-        <p14:creationId xmlns:p14="http://schemas.microsoft.com/office/powerpoint/2010/main" val="2992581156"/>
-      </p:ext>
-    </p:extLst>
-  </p:cSld>
-  <p:clrMapOvr>
-    <a:masterClrMapping/>
-  </p:clrMapOvr>
-</p:sld>
-</file>
-
-<file path=ppt/slides/slide6.xml><?xml version="1.0" encoding="utf-8"?>
-<p:sld xmlns:a="http://schemas.openxmlformats.org/drawingml/2006/main" xmlns:r="http://schemas.openxmlformats.org/officeDocument/2006/relationships" xmlns:p="http://schemas.openxmlformats.org/presentationml/2006/main">
   <p:cSld name="Slide 5">
     <p:bg>
       <p:bgPr>
         <a:solidFill>
-          <a:srgbClr val="0F172A"/>
+          <a:srgbClr val="EFF6FF"/>
         </a:solidFill>
-        <a:effectLst/>
       </p:bgPr>
     </p:bg>
     <p:spTree>
@@ -5978,6 +5600,1097 @@
         </p:nvSpPr>
         <p:spPr>
           <a:xfrm>
+            <a:off x="0" y="0"/>
+            <a:ext cx="9144000" cy="64008"/>
+          </a:xfrm>
+          <a:prstGeom prst="rect">
+            <a:avLst/>
+          </a:prstGeom>
+          <a:solidFill>
+            <a:srgbClr val="38BDF8"/>
+          </a:solidFill>
+          <a:ln w="12700">
+            <a:solidFill>
+              <a:srgbClr val="38BDF8"/>
+            </a:solidFill>
+            <a:prstDash val="solid"/>
+          </a:ln>
+        </p:spPr>
+      </p:sp>
+      <p:sp>
+        <p:nvSpPr>
+          <p:cNvPr id="3" name="Text 1"/>
+          <p:cNvSpPr/>
+          <p:nvPr/>
+        </p:nvSpPr>
+        <p:spPr>
+          <a:xfrm>
+            <a:off x="457200" y="182880"/>
+            <a:ext cx="8229600" cy="594360"/>
+          </a:xfrm>
+          <a:prstGeom prst="rect">
+            <a:avLst/>
+          </a:prstGeom>
+          <a:noFill/>
+          <a:ln/>
+        </p:spPr>
+        <p:txBody>
+          <a:bodyPr wrap="square" lIns="0" tIns="0" rIns="0" bIns="0" rtlCol="0" anchor="ctr"/>
+          <a:lstStyle/>
+          <a:p>
+            <a:pPr algn="l" indent="0" marL="0">
+              <a:buNone/>
+            </a:pPr>
+            <a:r>
+              <a:rPr lang="en-US" sz="3000" b="1" dirty="0">
+                <a:solidFill>
+                  <a:srgbClr val="0F172A"/>
+                </a:solidFill>
+                <a:latin typeface="Arial Black" pitchFamily="34" charset="0"/>
+                <a:ea typeface="Arial Black" pitchFamily="34" charset="-122"/>
+                <a:cs typeface="Arial Black" pitchFamily="34" charset="-120"/>
+              </a:rPr>
+              <a:t>What Good Looks Like</a:t>
+            </a:r>
+            <a:endParaRPr lang="en-US" sz="3000" dirty="0"/>
+          </a:p>
+        </p:txBody>
+      </p:sp>
+      <p:sp>
+        <p:nvSpPr>
+          <p:cNvPr id="4" name="Shape 2"/>
+          <p:cNvSpPr/>
+          <p:nvPr/>
+        </p:nvSpPr>
+        <p:spPr>
+          <a:xfrm>
+            <a:off x="365760" y="960120"/>
+            <a:ext cx="8412480" cy="658368"/>
+          </a:xfrm>
+          <a:prstGeom prst="rect">
+            <a:avLst/>
+          </a:prstGeom>
+          <a:solidFill>
+            <a:srgbClr val="FFFFFF"/>
+          </a:solidFill>
+          <a:ln w="12700">
+            <a:solidFill>
+              <a:srgbClr val="CBD5E1"/>
+            </a:solidFill>
+            <a:prstDash val="solid"/>
+          </a:ln>
+          <a:effectLst>
+            <a:outerShdw sx="100000" sy="100000" kx="0" ky="0" algn="bl" rotWithShape="0" blurRad="76200" dist="38100" dir="8100000">
+              <a:srgbClr val="000000">
+                <a:alpha val="10000"/>
+              </a:srgbClr>
+            </a:outerShdw>
+          </a:effectLst>
+        </p:spPr>
+      </p:sp>
+      <p:sp>
+        <p:nvSpPr>
+          <p:cNvPr id="5" name="Shape 3"/>
+          <p:cNvSpPr/>
+          <p:nvPr/>
+        </p:nvSpPr>
+        <p:spPr>
+          <a:xfrm>
+            <a:off x="548640" y="1106424"/>
+            <a:ext cx="384048" cy="384048"/>
+          </a:xfrm>
+          <a:prstGeom prst="ellipse">
+            <a:avLst/>
+          </a:prstGeom>
+          <a:solidFill>
+            <a:srgbClr val="38BDF8"/>
+          </a:solidFill>
+          <a:ln w="12700">
+            <a:solidFill>
+              <a:srgbClr val="38BDF8"/>
+            </a:solidFill>
+            <a:prstDash val="solid"/>
+          </a:ln>
+        </p:spPr>
+      </p:sp>
+      <p:sp>
+        <p:nvSpPr>
+          <p:cNvPr id="6" name="Text 4"/>
+          <p:cNvSpPr/>
+          <p:nvPr/>
+        </p:nvSpPr>
+        <p:spPr>
+          <a:xfrm>
+            <a:off x="548640" y="1106424"/>
+            <a:ext cx="384048" cy="384048"/>
+          </a:xfrm>
+          <a:prstGeom prst="rect">
+            <a:avLst/>
+          </a:prstGeom>
+          <a:noFill/>
+          <a:ln/>
+        </p:spPr>
+        <p:txBody>
+          <a:bodyPr wrap="square" lIns="0" tIns="0" rIns="0" bIns="0" rtlCol="0" anchor="ctr"/>
+          <a:lstStyle/>
+          <a:p>
+            <a:pPr algn="ctr" indent="0" marL="0">
+              <a:buNone/>
+            </a:pPr>
+            <a:r>
+              <a:rPr lang="en-US" sz="1100" b="1" dirty="0">
+                <a:solidFill>
+                  <a:srgbClr val="0F172A"/>
+                </a:solidFill>
+                <a:latin typeface="Arial Black" pitchFamily="34" charset="0"/>
+                <a:ea typeface="Arial Black" pitchFamily="34" charset="-122"/>
+                <a:cs typeface="Arial Black" pitchFamily="34" charset="-120"/>
+              </a:rPr>
+              <a:t>01</a:t>
+            </a:r>
+            <a:endParaRPr lang="en-US" sz="1100" dirty="0"/>
+          </a:p>
+        </p:txBody>
+      </p:sp>
+      <p:sp>
+        <p:nvSpPr>
+          <p:cNvPr id="7" name="Text 5"/>
+          <p:cNvSpPr/>
+          <p:nvPr/>
+        </p:nvSpPr>
+        <p:spPr>
+          <a:xfrm>
+            <a:off x="1078992" y="1033272"/>
+            <a:ext cx="3017520" cy="512064"/>
+          </a:xfrm>
+          <a:prstGeom prst="rect">
+            <a:avLst/>
+          </a:prstGeom>
+          <a:noFill/>
+          <a:ln/>
+        </p:spPr>
+        <p:txBody>
+          <a:bodyPr wrap="square" lIns="0" tIns="0" rIns="0" bIns="0" rtlCol="0" anchor="ctr"/>
+          <a:lstStyle/>
+          <a:p>
+            <a:pPr algn="l" indent="0" marL="0">
+              <a:buNone/>
+            </a:pPr>
+            <a:r>
+              <a:rPr lang="en-US" sz="1300" b="1" dirty="0">
+                <a:solidFill>
+                  <a:srgbClr val="0F172A"/>
+                </a:solidFill>
+                <a:latin typeface="Arial Black" pitchFamily="34" charset="0"/>
+                <a:ea typeface="Arial Black" pitchFamily="34" charset="-122"/>
+                <a:cs typeface="Arial Black" pitchFamily="34" charset="-120"/>
+              </a:rPr>
+              <a:t>AI Inventory as a Control Plane</a:t>
+            </a:r>
+            <a:endParaRPr lang="en-US" sz="1300" dirty="0"/>
+          </a:p>
+        </p:txBody>
+      </p:sp>
+      <p:sp>
+        <p:nvSpPr>
+          <p:cNvPr id="8" name="Shape 6"/>
+          <p:cNvSpPr/>
+          <p:nvPr/>
+        </p:nvSpPr>
+        <p:spPr>
+          <a:xfrm>
+            <a:off x="4160520" y="1051560"/>
+            <a:ext cx="27432" cy="475488"/>
+          </a:xfrm>
+          <a:prstGeom prst="rect">
+            <a:avLst/>
+          </a:prstGeom>
+          <a:solidFill>
+            <a:srgbClr val="CBD5E1"/>
+          </a:solidFill>
+          <a:ln w="12700">
+            <a:solidFill>
+              <a:srgbClr val="CBD5E1"/>
+            </a:solidFill>
+            <a:prstDash val="solid"/>
+          </a:ln>
+        </p:spPr>
+      </p:sp>
+      <p:sp>
+        <p:nvSpPr>
+          <p:cNvPr id="9" name="Text 7"/>
+          <p:cNvSpPr/>
+          <p:nvPr/>
+        </p:nvSpPr>
+        <p:spPr>
+          <a:xfrm>
+            <a:off x="4315968" y="1033272"/>
+            <a:ext cx="4297680" cy="512064"/>
+          </a:xfrm>
+          <a:prstGeom prst="rect">
+            <a:avLst/>
+          </a:prstGeom>
+          <a:noFill/>
+          <a:ln/>
+        </p:spPr>
+        <p:txBody>
+          <a:bodyPr wrap="square" rtlCol="0" anchor="ctr"/>
+          <a:lstStyle/>
+          <a:p>
+            <a:pPr algn="l" indent="0" marL="0">
+              <a:buNone/>
+            </a:pPr>
+            <a:r>
+              <a:rPr lang="en-US" sz="1200" dirty="0">
+                <a:solidFill>
+                  <a:srgbClr val="475569"/>
+                </a:solidFill>
+                <a:latin typeface="Calibri" pitchFamily="34" charset="0"/>
+                <a:ea typeface="Calibri" pitchFamily="34" charset="-122"/>
+                <a:cs typeface="Calibri" pitchFamily="34" charset="-120"/>
+              </a:rPr>
+              <a:t>Know what AI is running, where, and what data it touches — before you can govern it.</a:t>
+            </a:r>
+            <a:endParaRPr lang="en-US" sz="1200" dirty="0"/>
+          </a:p>
+        </p:txBody>
+      </p:sp>
+      <p:sp>
+        <p:nvSpPr>
+          <p:cNvPr id="10" name="Shape 8"/>
+          <p:cNvSpPr/>
+          <p:nvPr/>
+        </p:nvSpPr>
+        <p:spPr>
+          <a:xfrm>
+            <a:off x="365760" y="1728216"/>
+            <a:ext cx="8412480" cy="658368"/>
+          </a:xfrm>
+          <a:prstGeom prst="rect">
+            <a:avLst/>
+          </a:prstGeom>
+          <a:solidFill>
+            <a:srgbClr val="E8F4FD"/>
+          </a:solidFill>
+          <a:ln w="12700">
+            <a:solidFill>
+              <a:srgbClr val="CBD5E1"/>
+            </a:solidFill>
+            <a:prstDash val="solid"/>
+          </a:ln>
+          <a:effectLst>
+            <a:outerShdw sx="100000" sy="100000" kx="0" ky="0" algn="bl" rotWithShape="0" blurRad="76200" dist="38100" dir="8100000">
+              <a:srgbClr val="000000">
+                <a:alpha val="10000"/>
+              </a:srgbClr>
+            </a:outerShdw>
+          </a:effectLst>
+        </p:spPr>
+      </p:sp>
+      <p:sp>
+        <p:nvSpPr>
+          <p:cNvPr id="11" name="Shape 9"/>
+          <p:cNvSpPr/>
+          <p:nvPr/>
+        </p:nvSpPr>
+        <p:spPr>
+          <a:xfrm>
+            <a:off x="548640" y="1874520"/>
+            <a:ext cx="384048" cy="384048"/>
+          </a:xfrm>
+          <a:prstGeom prst="ellipse">
+            <a:avLst/>
+          </a:prstGeom>
+          <a:solidFill>
+            <a:srgbClr val="38BDF8"/>
+          </a:solidFill>
+          <a:ln w="12700">
+            <a:solidFill>
+              <a:srgbClr val="38BDF8"/>
+            </a:solidFill>
+            <a:prstDash val="solid"/>
+          </a:ln>
+        </p:spPr>
+      </p:sp>
+      <p:sp>
+        <p:nvSpPr>
+          <p:cNvPr id="12" name="Text 10"/>
+          <p:cNvSpPr/>
+          <p:nvPr/>
+        </p:nvSpPr>
+        <p:spPr>
+          <a:xfrm>
+            <a:off x="548640" y="1874520"/>
+            <a:ext cx="384048" cy="384048"/>
+          </a:xfrm>
+          <a:prstGeom prst="rect">
+            <a:avLst/>
+          </a:prstGeom>
+          <a:noFill/>
+          <a:ln/>
+        </p:spPr>
+        <p:txBody>
+          <a:bodyPr wrap="square" lIns="0" tIns="0" rIns="0" bIns="0" rtlCol="0" anchor="ctr"/>
+          <a:lstStyle/>
+          <a:p>
+            <a:pPr algn="ctr" indent="0" marL="0">
+              <a:buNone/>
+            </a:pPr>
+            <a:r>
+              <a:rPr lang="en-US" sz="1100" b="1" dirty="0">
+                <a:solidFill>
+                  <a:srgbClr val="0F172A"/>
+                </a:solidFill>
+                <a:latin typeface="Arial Black" pitchFamily="34" charset="0"/>
+                <a:ea typeface="Arial Black" pitchFamily="34" charset="-122"/>
+                <a:cs typeface="Arial Black" pitchFamily="34" charset="-120"/>
+              </a:rPr>
+              <a:t>02</a:t>
+            </a:r>
+            <a:endParaRPr lang="en-US" sz="1100" dirty="0"/>
+          </a:p>
+        </p:txBody>
+      </p:sp>
+      <p:sp>
+        <p:nvSpPr>
+          <p:cNvPr id="13" name="Text 11"/>
+          <p:cNvSpPr/>
+          <p:nvPr/>
+        </p:nvSpPr>
+        <p:spPr>
+          <a:xfrm>
+            <a:off x="1078992" y="1801368"/>
+            <a:ext cx="3017520" cy="512064"/>
+          </a:xfrm>
+          <a:prstGeom prst="rect">
+            <a:avLst/>
+          </a:prstGeom>
+          <a:noFill/>
+          <a:ln/>
+        </p:spPr>
+        <p:txBody>
+          <a:bodyPr wrap="square" lIns="0" tIns="0" rIns="0" bIns="0" rtlCol="0" anchor="ctr"/>
+          <a:lstStyle/>
+          <a:p>
+            <a:pPr algn="l" indent="0" marL="0">
+              <a:buNone/>
+            </a:pPr>
+            <a:r>
+              <a:rPr lang="en-US" sz="1300" b="1" dirty="0">
+                <a:solidFill>
+                  <a:srgbClr val="0F172A"/>
+                </a:solidFill>
+                <a:latin typeface="Arial Black" pitchFamily="34" charset="0"/>
+                <a:ea typeface="Arial Black" pitchFamily="34" charset="-122"/>
+                <a:cs typeface="Arial Black" pitchFamily="34" charset="-120"/>
+              </a:rPr>
+              <a:t>Responsible AI Governance</a:t>
+            </a:r>
+            <a:endParaRPr lang="en-US" sz="1300" dirty="0"/>
+          </a:p>
+        </p:txBody>
+      </p:sp>
+      <p:sp>
+        <p:nvSpPr>
+          <p:cNvPr id="14" name="Shape 12"/>
+          <p:cNvSpPr/>
+          <p:nvPr/>
+        </p:nvSpPr>
+        <p:spPr>
+          <a:xfrm>
+            <a:off x="4160520" y="1819656"/>
+            <a:ext cx="27432" cy="475488"/>
+          </a:xfrm>
+          <a:prstGeom prst="rect">
+            <a:avLst/>
+          </a:prstGeom>
+          <a:solidFill>
+            <a:srgbClr val="CBD5E1"/>
+          </a:solidFill>
+          <a:ln w="12700">
+            <a:solidFill>
+              <a:srgbClr val="CBD5E1"/>
+            </a:solidFill>
+            <a:prstDash val="solid"/>
+          </a:ln>
+        </p:spPr>
+      </p:sp>
+      <p:sp>
+        <p:nvSpPr>
+          <p:cNvPr id="15" name="Text 13"/>
+          <p:cNvSpPr/>
+          <p:nvPr/>
+        </p:nvSpPr>
+        <p:spPr>
+          <a:xfrm>
+            <a:off x="4315968" y="1801368"/>
+            <a:ext cx="4297680" cy="512064"/>
+          </a:xfrm>
+          <a:prstGeom prst="rect">
+            <a:avLst/>
+          </a:prstGeom>
+          <a:noFill/>
+          <a:ln/>
+        </p:spPr>
+        <p:txBody>
+          <a:bodyPr wrap="square" rtlCol="0" anchor="ctr"/>
+          <a:lstStyle/>
+          <a:p>
+            <a:pPr algn="l" indent="0" marL="0">
+              <a:buNone/>
+            </a:pPr>
+            <a:r>
+              <a:rPr lang="en-US" sz="1200" dirty="0">
+                <a:solidFill>
+                  <a:srgbClr val="475569"/>
+                </a:solidFill>
+                <a:latin typeface="Calibri" pitchFamily="34" charset="0"/>
+                <a:ea typeface="Calibri" pitchFamily="34" charset="-122"/>
+                <a:cs typeface="Calibri" pitchFamily="34" charset="-120"/>
+              </a:rPr>
+              <a:t>Policies, accountability chains, and audit trails for every AI decision that matters.</a:t>
+            </a:r>
+            <a:endParaRPr lang="en-US" sz="1200" dirty="0"/>
+          </a:p>
+        </p:txBody>
+      </p:sp>
+      <p:sp>
+        <p:nvSpPr>
+          <p:cNvPr id="16" name="Shape 14"/>
+          <p:cNvSpPr/>
+          <p:nvPr/>
+        </p:nvSpPr>
+        <p:spPr>
+          <a:xfrm>
+            <a:off x="365760" y="2496312"/>
+            <a:ext cx="8412480" cy="658368"/>
+          </a:xfrm>
+          <a:prstGeom prst="rect">
+            <a:avLst/>
+          </a:prstGeom>
+          <a:solidFill>
+            <a:srgbClr val="FFFFFF"/>
+          </a:solidFill>
+          <a:ln w="12700">
+            <a:solidFill>
+              <a:srgbClr val="CBD5E1"/>
+            </a:solidFill>
+            <a:prstDash val="solid"/>
+          </a:ln>
+          <a:effectLst>
+            <a:outerShdw sx="100000" sy="100000" kx="0" ky="0" algn="bl" rotWithShape="0" blurRad="76200" dist="38100" dir="8100000">
+              <a:srgbClr val="000000">
+                <a:alpha val="10000"/>
+              </a:srgbClr>
+            </a:outerShdw>
+          </a:effectLst>
+        </p:spPr>
+      </p:sp>
+      <p:sp>
+        <p:nvSpPr>
+          <p:cNvPr id="17" name="Shape 15"/>
+          <p:cNvSpPr/>
+          <p:nvPr/>
+        </p:nvSpPr>
+        <p:spPr>
+          <a:xfrm>
+            <a:off x="548640" y="2642616"/>
+            <a:ext cx="384048" cy="384048"/>
+          </a:xfrm>
+          <a:prstGeom prst="ellipse">
+            <a:avLst/>
+          </a:prstGeom>
+          <a:solidFill>
+            <a:srgbClr val="38BDF8"/>
+          </a:solidFill>
+          <a:ln w="12700">
+            <a:solidFill>
+              <a:srgbClr val="38BDF8"/>
+            </a:solidFill>
+            <a:prstDash val="solid"/>
+          </a:ln>
+        </p:spPr>
+      </p:sp>
+      <p:sp>
+        <p:nvSpPr>
+          <p:cNvPr id="18" name="Text 16"/>
+          <p:cNvSpPr/>
+          <p:nvPr/>
+        </p:nvSpPr>
+        <p:spPr>
+          <a:xfrm>
+            <a:off x="548640" y="2642616"/>
+            <a:ext cx="384048" cy="384048"/>
+          </a:xfrm>
+          <a:prstGeom prst="rect">
+            <a:avLst/>
+          </a:prstGeom>
+          <a:noFill/>
+          <a:ln/>
+        </p:spPr>
+        <p:txBody>
+          <a:bodyPr wrap="square" lIns="0" tIns="0" rIns="0" bIns="0" rtlCol="0" anchor="ctr"/>
+          <a:lstStyle/>
+          <a:p>
+            <a:pPr algn="ctr" indent="0" marL="0">
+              <a:buNone/>
+            </a:pPr>
+            <a:r>
+              <a:rPr lang="en-US" sz="1100" b="1" dirty="0">
+                <a:solidFill>
+                  <a:srgbClr val="0F172A"/>
+                </a:solidFill>
+                <a:latin typeface="Arial Black" pitchFamily="34" charset="0"/>
+                <a:ea typeface="Arial Black" pitchFamily="34" charset="-122"/>
+                <a:cs typeface="Arial Black" pitchFamily="34" charset="-120"/>
+              </a:rPr>
+              <a:t>03</a:t>
+            </a:r>
+            <a:endParaRPr lang="en-US" sz="1100" dirty="0"/>
+          </a:p>
+        </p:txBody>
+      </p:sp>
+      <p:sp>
+        <p:nvSpPr>
+          <p:cNvPr id="19" name="Text 17"/>
+          <p:cNvSpPr/>
+          <p:nvPr/>
+        </p:nvSpPr>
+        <p:spPr>
+          <a:xfrm>
+            <a:off x="1078992" y="2569464"/>
+            <a:ext cx="3017520" cy="512064"/>
+          </a:xfrm>
+          <a:prstGeom prst="rect">
+            <a:avLst/>
+          </a:prstGeom>
+          <a:noFill/>
+          <a:ln/>
+        </p:spPr>
+        <p:txBody>
+          <a:bodyPr wrap="square" lIns="0" tIns="0" rIns="0" bIns="0" rtlCol="0" anchor="ctr"/>
+          <a:lstStyle/>
+          <a:p>
+            <a:pPr algn="l" indent="0" marL="0">
+              <a:buNone/>
+            </a:pPr>
+            <a:r>
+              <a:rPr lang="en-US" sz="1300" b="1" dirty="0">
+                <a:solidFill>
+                  <a:srgbClr val="0F172A"/>
+                </a:solidFill>
+                <a:latin typeface="Arial Black" pitchFamily="34" charset="0"/>
+                <a:ea typeface="Arial Black" pitchFamily="34" charset="-122"/>
+                <a:cs typeface="Arial Black" pitchFamily="34" charset="-120"/>
+              </a:rPr>
+              <a:t>Human-in-the-Loop by Design</a:t>
+            </a:r>
+            <a:endParaRPr lang="en-US" sz="1300" dirty="0"/>
+          </a:p>
+        </p:txBody>
+      </p:sp>
+      <p:sp>
+        <p:nvSpPr>
+          <p:cNvPr id="20" name="Shape 18"/>
+          <p:cNvSpPr/>
+          <p:nvPr/>
+        </p:nvSpPr>
+        <p:spPr>
+          <a:xfrm>
+            <a:off x="4160520" y="2587752"/>
+            <a:ext cx="27432" cy="475488"/>
+          </a:xfrm>
+          <a:prstGeom prst="rect">
+            <a:avLst/>
+          </a:prstGeom>
+          <a:solidFill>
+            <a:srgbClr val="CBD5E1"/>
+          </a:solidFill>
+          <a:ln w="12700">
+            <a:solidFill>
+              <a:srgbClr val="CBD5E1"/>
+            </a:solidFill>
+            <a:prstDash val="solid"/>
+          </a:ln>
+        </p:spPr>
+      </p:sp>
+      <p:sp>
+        <p:nvSpPr>
+          <p:cNvPr id="21" name="Text 19"/>
+          <p:cNvSpPr/>
+          <p:nvPr/>
+        </p:nvSpPr>
+        <p:spPr>
+          <a:xfrm>
+            <a:off x="4315968" y="2569464"/>
+            <a:ext cx="4297680" cy="512064"/>
+          </a:xfrm>
+          <a:prstGeom prst="rect">
+            <a:avLst/>
+          </a:prstGeom>
+          <a:noFill/>
+          <a:ln/>
+        </p:spPr>
+        <p:txBody>
+          <a:bodyPr wrap="square" rtlCol="0" anchor="ctr"/>
+          <a:lstStyle/>
+          <a:p>
+            <a:pPr algn="l" indent="0" marL="0">
+              <a:buNone/>
+            </a:pPr>
+            <a:r>
+              <a:rPr lang="en-US" sz="1200" dirty="0">
+                <a:solidFill>
+                  <a:srgbClr val="475569"/>
+                </a:solidFill>
+                <a:latin typeface="Calibri" pitchFamily="34" charset="0"/>
+                <a:ea typeface="Calibri" pitchFamily="34" charset="-122"/>
+                <a:cs typeface="Calibri" pitchFamily="34" charset="-120"/>
+              </a:rPr>
+              <a:t>Not as a fallback. Baked into the architecture — especially for high-stakes outputs.</a:t>
+            </a:r>
+            <a:endParaRPr lang="en-US" sz="1200" dirty="0"/>
+          </a:p>
+        </p:txBody>
+      </p:sp>
+      <p:sp>
+        <p:nvSpPr>
+          <p:cNvPr id="22" name="Shape 20"/>
+          <p:cNvSpPr/>
+          <p:nvPr/>
+        </p:nvSpPr>
+        <p:spPr>
+          <a:xfrm>
+            <a:off x="365760" y="3264408"/>
+            <a:ext cx="8412480" cy="658368"/>
+          </a:xfrm>
+          <a:prstGeom prst="rect">
+            <a:avLst/>
+          </a:prstGeom>
+          <a:solidFill>
+            <a:srgbClr val="E8F4FD"/>
+          </a:solidFill>
+          <a:ln w="12700">
+            <a:solidFill>
+              <a:srgbClr val="CBD5E1"/>
+            </a:solidFill>
+            <a:prstDash val="solid"/>
+          </a:ln>
+          <a:effectLst>
+            <a:outerShdw sx="100000" sy="100000" kx="0" ky="0" algn="bl" rotWithShape="0" blurRad="76200" dist="38100" dir="8100000">
+              <a:srgbClr val="000000">
+                <a:alpha val="10000"/>
+              </a:srgbClr>
+            </a:outerShdw>
+          </a:effectLst>
+        </p:spPr>
+      </p:sp>
+      <p:sp>
+        <p:nvSpPr>
+          <p:cNvPr id="23" name="Shape 21"/>
+          <p:cNvSpPr/>
+          <p:nvPr/>
+        </p:nvSpPr>
+        <p:spPr>
+          <a:xfrm>
+            <a:off x="548640" y="3410712"/>
+            <a:ext cx="384048" cy="384048"/>
+          </a:xfrm>
+          <a:prstGeom prst="ellipse">
+            <a:avLst/>
+          </a:prstGeom>
+          <a:solidFill>
+            <a:srgbClr val="38BDF8"/>
+          </a:solidFill>
+          <a:ln w="12700">
+            <a:solidFill>
+              <a:srgbClr val="38BDF8"/>
+            </a:solidFill>
+            <a:prstDash val="solid"/>
+          </a:ln>
+        </p:spPr>
+      </p:sp>
+      <p:sp>
+        <p:nvSpPr>
+          <p:cNvPr id="24" name="Text 22"/>
+          <p:cNvSpPr/>
+          <p:nvPr/>
+        </p:nvSpPr>
+        <p:spPr>
+          <a:xfrm>
+            <a:off x="548640" y="3410712"/>
+            <a:ext cx="384048" cy="384048"/>
+          </a:xfrm>
+          <a:prstGeom prst="rect">
+            <a:avLst/>
+          </a:prstGeom>
+          <a:noFill/>
+          <a:ln/>
+        </p:spPr>
+        <p:txBody>
+          <a:bodyPr wrap="square" lIns="0" tIns="0" rIns="0" bIns="0" rtlCol="0" anchor="ctr"/>
+          <a:lstStyle/>
+          <a:p>
+            <a:pPr algn="ctr" indent="0" marL="0">
+              <a:buNone/>
+            </a:pPr>
+            <a:r>
+              <a:rPr lang="en-US" sz="1100" b="1" dirty="0">
+                <a:solidFill>
+                  <a:srgbClr val="0F172A"/>
+                </a:solidFill>
+                <a:latin typeface="Arial Black" pitchFamily="34" charset="0"/>
+                <a:ea typeface="Arial Black" pitchFamily="34" charset="-122"/>
+                <a:cs typeface="Arial Black" pitchFamily="34" charset="-120"/>
+              </a:rPr>
+              <a:t>04</a:t>
+            </a:r>
+            <a:endParaRPr lang="en-US" sz="1100" dirty="0"/>
+          </a:p>
+        </p:txBody>
+      </p:sp>
+      <p:sp>
+        <p:nvSpPr>
+          <p:cNvPr id="25" name="Text 23"/>
+          <p:cNvSpPr/>
+          <p:nvPr/>
+        </p:nvSpPr>
+        <p:spPr>
+          <a:xfrm>
+            <a:off x="1078992" y="3337560"/>
+            <a:ext cx="3017520" cy="512064"/>
+          </a:xfrm>
+          <a:prstGeom prst="rect">
+            <a:avLst/>
+          </a:prstGeom>
+          <a:noFill/>
+          <a:ln/>
+        </p:spPr>
+        <p:txBody>
+          <a:bodyPr wrap="square" lIns="0" tIns="0" rIns="0" bIns="0" rtlCol="0" anchor="ctr"/>
+          <a:lstStyle/>
+          <a:p>
+            <a:pPr algn="l" indent="0" marL="0">
+              <a:buNone/>
+            </a:pPr>
+            <a:r>
+              <a:rPr lang="en-US" sz="1300" b="1" dirty="0">
+                <a:solidFill>
+                  <a:srgbClr val="0F172A"/>
+                </a:solidFill>
+                <a:latin typeface="Arial Black" pitchFamily="34" charset="0"/>
+                <a:ea typeface="Arial Black" pitchFamily="34" charset="-122"/>
+                <a:cs typeface="Arial Black" pitchFamily="34" charset="-120"/>
+              </a:rPr>
+              <a:t>Strong Data Governance First</a:t>
+            </a:r>
+            <a:endParaRPr lang="en-US" sz="1300" dirty="0"/>
+          </a:p>
+        </p:txBody>
+      </p:sp>
+      <p:sp>
+        <p:nvSpPr>
+          <p:cNvPr id="26" name="Shape 24"/>
+          <p:cNvSpPr/>
+          <p:nvPr/>
+        </p:nvSpPr>
+        <p:spPr>
+          <a:xfrm>
+            <a:off x="4160520" y="3355848"/>
+            <a:ext cx="27432" cy="475488"/>
+          </a:xfrm>
+          <a:prstGeom prst="rect">
+            <a:avLst/>
+          </a:prstGeom>
+          <a:solidFill>
+            <a:srgbClr val="CBD5E1"/>
+          </a:solidFill>
+          <a:ln w="12700">
+            <a:solidFill>
+              <a:srgbClr val="CBD5E1"/>
+            </a:solidFill>
+            <a:prstDash val="solid"/>
+          </a:ln>
+        </p:spPr>
+      </p:sp>
+      <p:sp>
+        <p:nvSpPr>
+          <p:cNvPr id="27" name="Text 25"/>
+          <p:cNvSpPr/>
+          <p:nvPr/>
+        </p:nvSpPr>
+        <p:spPr>
+          <a:xfrm>
+            <a:off x="4315968" y="3337560"/>
+            <a:ext cx="4297680" cy="512064"/>
+          </a:xfrm>
+          <a:prstGeom prst="rect">
+            <a:avLst/>
+          </a:prstGeom>
+          <a:noFill/>
+          <a:ln/>
+        </p:spPr>
+        <p:txBody>
+          <a:bodyPr wrap="square" rtlCol="0" anchor="ctr"/>
+          <a:lstStyle/>
+          <a:p>
+            <a:pPr algn="l" indent="0" marL="0">
+              <a:buNone/>
+            </a:pPr>
+            <a:r>
+              <a:rPr lang="en-US" sz="1200" dirty="0">
+                <a:solidFill>
+                  <a:srgbClr val="475569"/>
+                </a:solidFill>
+                <a:latin typeface="Calibri" pitchFamily="34" charset="0"/>
+                <a:ea typeface="Calibri" pitchFamily="34" charset="-122"/>
+                <a:cs typeface="Calibri" pitchFamily="34" charset="-120"/>
+              </a:rPr>
+              <a:t>Garbage in, garbage out. If the data pipeline isn't clean, no AI layer fixes it.</a:t>
+            </a:r>
+            <a:endParaRPr lang="en-US" sz="1200" dirty="0"/>
+          </a:p>
+        </p:txBody>
+      </p:sp>
+      <p:sp>
+        <p:nvSpPr>
+          <p:cNvPr id="28" name="Shape 26"/>
+          <p:cNvSpPr/>
+          <p:nvPr/>
+        </p:nvSpPr>
+        <p:spPr>
+          <a:xfrm>
+            <a:off x="365760" y="4032504"/>
+            <a:ext cx="8412480" cy="658368"/>
+          </a:xfrm>
+          <a:prstGeom prst="rect">
+            <a:avLst/>
+          </a:prstGeom>
+          <a:solidFill>
+            <a:srgbClr val="FFFFFF"/>
+          </a:solidFill>
+          <a:ln w="12700">
+            <a:solidFill>
+              <a:srgbClr val="CBD5E1"/>
+            </a:solidFill>
+            <a:prstDash val="solid"/>
+          </a:ln>
+          <a:effectLst>
+            <a:outerShdw sx="100000" sy="100000" kx="0" ky="0" algn="bl" rotWithShape="0" blurRad="76200" dist="38100" dir="8100000">
+              <a:srgbClr val="000000">
+                <a:alpha val="10000"/>
+              </a:srgbClr>
+            </a:outerShdw>
+          </a:effectLst>
+        </p:spPr>
+      </p:sp>
+      <p:sp>
+        <p:nvSpPr>
+          <p:cNvPr id="29" name="Shape 27"/>
+          <p:cNvSpPr/>
+          <p:nvPr/>
+        </p:nvSpPr>
+        <p:spPr>
+          <a:xfrm>
+            <a:off x="548640" y="4178808"/>
+            <a:ext cx="384048" cy="384048"/>
+          </a:xfrm>
+          <a:prstGeom prst="ellipse">
+            <a:avLst/>
+          </a:prstGeom>
+          <a:solidFill>
+            <a:srgbClr val="38BDF8"/>
+          </a:solidFill>
+          <a:ln w="12700">
+            <a:solidFill>
+              <a:srgbClr val="38BDF8"/>
+            </a:solidFill>
+            <a:prstDash val="solid"/>
+          </a:ln>
+        </p:spPr>
+      </p:sp>
+      <p:sp>
+        <p:nvSpPr>
+          <p:cNvPr id="30" name="Text 28"/>
+          <p:cNvSpPr/>
+          <p:nvPr/>
+        </p:nvSpPr>
+        <p:spPr>
+          <a:xfrm>
+            <a:off x="548640" y="4178808"/>
+            <a:ext cx="384048" cy="384048"/>
+          </a:xfrm>
+          <a:prstGeom prst="rect">
+            <a:avLst/>
+          </a:prstGeom>
+          <a:noFill/>
+          <a:ln/>
+        </p:spPr>
+        <p:txBody>
+          <a:bodyPr wrap="square" lIns="0" tIns="0" rIns="0" bIns="0" rtlCol="0" anchor="ctr"/>
+          <a:lstStyle/>
+          <a:p>
+            <a:pPr algn="ctr" indent="0" marL="0">
+              <a:buNone/>
+            </a:pPr>
+            <a:r>
+              <a:rPr lang="en-US" sz="1100" b="1" dirty="0">
+                <a:solidFill>
+                  <a:srgbClr val="0F172A"/>
+                </a:solidFill>
+                <a:latin typeface="Arial Black" pitchFamily="34" charset="0"/>
+                <a:ea typeface="Arial Black" pitchFamily="34" charset="-122"/>
+                <a:cs typeface="Arial Black" pitchFamily="34" charset="-120"/>
+              </a:rPr>
+              <a:t>05</a:t>
+            </a:r>
+            <a:endParaRPr lang="en-US" sz="1100" dirty="0"/>
+          </a:p>
+        </p:txBody>
+      </p:sp>
+      <p:sp>
+        <p:nvSpPr>
+          <p:cNvPr id="31" name="Text 29"/>
+          <p:cNvSpPr/>
+          <p:nvPr/>
+        </p:nvSpPr>
+        <p:spPr>
+          <a:xfrm>
+            <a:off x="1078992" y="4105656"/>
+            <a:ext cx="3017520" cy="512064"/>
+          </a:xfrm>
+          <a:prstGeom prst="rect">
+            <a:avLst/>
+          </a:prstGeom>
+          <a:noFill/>
+          <a:ln/>
+        </p:spPr>
+        <p:txBody>
+          <a:bodyPr wrap="square" lIns="0" tIns="0" rIns="0" bIns="0" rtlCol="0" anchor="ctr"/>
+          <a:lstStyle/>
+          <a:p>
+            <a:pPr algn="l" indent="0" marL="0">
+              <a:buNone/>
+            </a:pPr>
+            <a:r>
+              <a:rPr lang="en-US" sz="1300" b="1" dirty="0">
+                <a:solidFill>
+                  <a:srgbClr val="0F172A"/>
+                </a:solidFill>
+                <a:latin typeface="Arial Black" pitchFamily="34" charset="0"/>
+                <a:ea typeface="Arial Black" pitchFamily="34" charset="-122"/>
+                <a:cs typeface="Arial Black" pitchFamily="34" charset="-120"/>
+              </a:rPr>
+              <a:t>Explicit Limits on AI Authority</a:t>
+            </a:r>
+            <a:endParaRPr lang="en-US" sz="1300" dirty="0"/>
+          </a:p>
+        </p:txBody>
+      </p:sp>
+      <p:sp>
+        <p:nvSpPr>
+          <p:cNvPr id="32" name="Shape 30"/>
+          <p:cNvSpPr/>
+          <p:nvPr/>
+        </p:nvSpPr>
+        <p:spPr>
+          <a:xfrm>
+            <a:off x="4160520" y="4123944"/>
+            <a:ext cx="27432" cy="475488"/>
+          </a:xfrm>
+          <a:prstGeom prst="rect">
+            <a:avLst/>
+          </a:prstGeom>
+          <a:solidFill>
+            <a:srgbClr val="CBD5E1"/>
+          </a:solidFill>
+          <a:ln w="12700">
+            <a:solidFill>
+              <a:srgbClr val="CBD5E1"/>
+            </a:solidFill>
+            <a:prstDash val="solid"/>
+          </a:ln>
+        </p:spPr>
+      </p:sp>
+      <p:sp>
+        <p:nvSpPr>
+          <p:cNvPr id="33" name="Text 31"/>
+          <p:cNvSpPr/>
+          <p:nvPr/>
+        </p:nvSpPr>
+        <p:spPr>
+          <a:xfrm>
+            <a:off x="4315968" y="4105656"/>
+            <a:ext cx="4297680" cy="512064"/>
+          </a:xfrm>
+          <a:prstGeom prst="rect">
+            <a:avLst/>
+          </a:prstGeom>
+          <a:noFill/>
+          <a:ln/>
+        </p:spPr>
+        <p:txBody>
+          <a:bodyPr wrap="square" rtlCol="0" anchor="ctr"/>
+          <a:lstStyle/>
+          <a:p>
+            <a:pPr algn="l" indent="0" marL="0">
+              <a:buNone/>
+            </a:pPr>
+            <a:r>
+              <a:rPr lang="en-US" sz="1200" dirty="0">
+                <a:solidFill>
+                  <a:srgbClr val="475569"/>
+                </a:solidFill>
+                <a:latin typeface="Calibri" pitchFamily="34" charset="0"/>
+                <a:ea typeface="Calibri" pitchFamily="34" charset="-122"/>
+                <a:cs typeface="Calibri" pitchFamily="34" charset="-120"/>
+              </a:rPr>
+              <a:t>Define what AI can decide alone, what it flags, and what it cannot touch. In writing.</a:t>
+            </a:r>
+            <a:endParaRPr lang="en-US" sz="1200" dirty="0"/>
+          </a:p>
+        </p:txBody>
+      </p:sp>
+    </p:spTree>
+  </p:cSld>
+  <p:clrMapOvr>
+    <a:masterClrMapping/>
+  </p:clrMapOvr>
+</p:sld>
+</file>
+
+<file path=ppt/slides/slide6.xml><?xml version="1.0" encoding="utf-8"?>
+<p:sld xmlns:a="http://schemas.openxmlformats.org/drawingml/2006/main" xmlns:r="http://schemas.openxmlformats.org/officeDocument/2006/relationships" xmlns:p="http://schemas.openxmlformats.org/presentationml/2006/main">
+  <p:cSld name="Slide 6">
+    <p:bg>
+      <p:bgPr>
+        <a:solidFill>
+          <a:srgbClr val="0F172A"/>
+        </a:solidFill>
+      </p:bgPr>
+    </p:bg>
+    <p:spTree>
+      <p:nvGrpSpPr>
+        <p:cNvPr id="1" name=""/>
+        <p:cNvGrpSpPr/>
+        <p:nvPr/>
+      </p:nvGrpSpPr>
+      <p:grpSpPr>
+        <a:xfrm>
+          <a:off x="0" y="0"/>
+          <a:ext cx="0" cy="0"/>
+          <a:chOff x="0" y="0"/>
+          <a:chExt cx="0" cy="0"/>
+        </a:xfrm>
+      </p:grpSpPr>
+      <p:sp>
+        <p:nvSpPr>
+          <p:cNvPr id="2" name="Shape 0"/>
+          <p:cNvSpPr/>
+          <p:nvPr/>
+        </p:nvSpPr>
+        <p:spPr>
+          <a:xfrm>
             <a:off x="0" y="4800600"/>
             <a:ext cx="9144000" cy="342900"/>
           </a:xfrm>
@@ -5994,13 +6707,6 @@
             <a:prstDash val="solid"/>
           </a:ln>
         </p:spPr>
-        <p:txBody>
-          <a:bodyPr/>
-          <a:lstStyle/>
-          <a:p>
-            <a:endParaRPr lang="en-US"/>
-          </a:p>
-        </p:txBody>
       </p:sp>
       <p:sp>
         <p:nvSpPr>
@@ -6026,13 +6732,6 @@
             <a:prstDash val="solid"/>
           </a:ln>
         </p:spPr>
-        <p:txBody>
-          <a:bodyPr/>
-          <a:lstStyle/>
-          <a:p>
-            <a:endParaRPr lang="en-US"/>
-          </a:p>
-        </p:txBody>
       </p:sp>
       <p:sp>
         <p:nvSpPr>
@@ -6055,7 +6754,7 @@
           <a:bodyPr wrap="square" rtlCol="0" anchor="ctr"/>
           <a:lstStyle/>
           <a:p>
-            <a:pPr marL="0" indent="0" algn="ctr">
+            <a:pPr algn="ctr" indent="0" marL="0">
               <a:buNone/>
             </a:pPr>
             <a:r>
@@ -6072,7 +6771,7 @@
             <a:endParaRPr lang="en-US" sz="2600" dirty="0"/>
           </a:p>
           <a:p>
-            <a:pPr marL="0" indent="0" algn="ctr">
+            <a:pPr algn="ctr" indent="0" marL="0">
               <a:buNone/>
             </a:pPr>
             <a:r>
@@ -6089,7 +6788,7 @@
             <a:endParaRPr lang="en-US" sz="2600" dirty="0"/>
           </a:p>
           <a:p>
-            <a:pPr marL="0" indent="0" algn="ctr">
+            <a:pPr algn="ctr" indent="0" marL="0">
               <a:buNone/>
             </a:pPr>
             <a:r>
@@ -6106,7 +6805,7 @@
             <a:endParaRPr lang="en-US" sz="2600" dirty="0"/>
           </a:p>
           <a:p>
-            <a:pPr marL="0" indent="0" algn="ctr">
+            <a:pPr algn="ctr" indent="0" marL="0">
               <a:buNone/>
             </a:pPr>
             <a:r>
@@ -6123,7 +6822,7 @@
             <a:endParaRPr lang="en-US" sz="2600" dirty="0"/>
           </a:p>
           <a:p>
-            <a:pPr marL="0" indent="0" algn="ctr">
+            <a:pPr algn="ctr" indent="0" marL="0">
               <a:buNone/>
             </a:pPr>
             <a:r>
@@ -6135,8 +6834,9 @@
                 <a:ea typeface="Calibri" pitchFamily="34" charset="-122"/>
                 <a:cs typeface="Calibri" pitchFamily="34" charset="-120"/>
               </a:rPr>
-              <a:t>and train it on the same noise.”</a:t>
-            </a:r>
+              <a:t>and train it on the same noise."</a:t>
+            </a:r>
+            <a:endParaRPr lang="en-US" sz="2600" dirty="0"/>
           </a:p>
         </p:txBody>
       </p:sp>
@@ -6164,13 +6864,6 @@
             <a:prstDash val="solid"/>
           </a:ln>
         </p:spPr>
-        <p:txBody>
-          <a:bodyPr/>
-          <a:lstStyle/>
-          <a:p>
-            <a:endParaRPr lang="en-US"/>
-          </a:p>
-        </p:txBody>
       </p:sp>
     </p:spTree>
   </p:cSld>
@@ -6473,319 +7166,4 @@
     </a:ext>
   </a:extLst>
 </a:theme>
-</file>
-
-<file path=ppt/theme/theme2.xml><?xml version="1.0" encoding="utf-8"?>
-<a:theme xmlns:a="http://schemas.openxmlformats.org/drawingml/2006/main" name="Office Theme">
-  <a:themeElements>
-    <a:clrScheme name="Office">
-      <a:dk1>
-        <a:sysClr val="windowText" lastClr="000000"/>
-      </a:dk1>
-      <a:lt1>
-        <a:sysClr val="window" lastClr="FFFFFF"/>
-      </a:lt1>
-      <a:dk2>
-        <a:srgbClr val="0E2841"/>
-      </a:dk2>
-      <a:lt2>
-        <a:srgbClr val="E8E8E8"/>
-      </a:lt2>
-      <a:accent1>
-        <a:srgbClr val="156082"/>
-      </a:accent1>
-      <a:accent2>
-        <a:srgbClr val="E97132"/>
-      </a:accent2>
-      <a:accent3>
-        <a:srgbClr val="196B24"/>
-      </a:accent3>
-      <a:accent4>
-        <a:srgbClr val="0F9ED5"/>
-      </a:accent4>
-      <a:accent5>
-        <a:srgbClr val="A02B93"/>
-      </a:accent5>
-      <a:accent6>
-        <a:srgbClr val="4EA72E"/>
-      </a:accent6>
-      <a:hlink>
-        <a:srgbClr val="467886"/>
-      </a:hlink>
-      <a:folHlink>
-        <a:srgbClr val="96607D"/>
-      </a:folHlink>
-    </a:clrScheme>
-    <a:fontScheme name="Office">
-      <a:majorFont>
-        <a:latin typeface="Aptos Display" panose="02110004020202020204"/>
-        <a:ea typeface=""/>
-        <a:cs typeface=""/>
-        <a:font script="Jpan" typeface="游ゴシック Light"/>
-        <a:font script="Hang" typeface="맑은 고딕"/>
-        <a:font script="Hans" typeface="等线 Light"/>
-        <a:font script="Hant" typeface="新細明體"/>
-        <a:font script="Arab" typeface="Times New Roman"/>
-        <a:font script="Hebr" typeface="Times New Roman"/>
-        <a:font script="Thai" typeface="Angsana New"/>
-        <a:font script="Ethi" typeface="Nyala"/>
-        <a:font script="Beng" typeface="Vrinda"/>
-        <a:font script="Gujr" typeface="Shruti"/>
-        <a:font script="Khmr" typeface="MoolBoran"/>
-        <a:font script="Knda" typeface="Tunga"/>
-        <a:font script="Guru" typeface="Raavi"/>
-        <a:font script="Cans" typeface="Euphemia"/>
-        <a:font script="Cher" typeface="Plantagenet Cherokee"/>
-        <a:font script="Yiii" typeface="Microsoft Yi Baiti"/>
-        <a:font script="Tibt" typeface="Microsoft Himalaya"/>
-        <a:font script="Thaa" typeface="MV Boli"/>
-        <a:font script="Deva" typeface="Mangal"/>
-        <a:font script="Telu" typeface="Gautami"/>
-        <a:font script="Taml" typeface="Latha"/>
-        <a:font script="Syrc" typeface="Estrangelo Edessa"/>
-        <a:font script="Orya" typeface="Kalinga"/>
-        <a:font script="Mlym" typeface="Kartika"/>
-        <a:font script="Laoo" typeface="DokChampa"/>
-        <a:font script="Sinh" typeface="Iskoola Pota"/>
-        <a:font script="Mong" typeface="Mongolian Baiti"/>
-        <a:font script="Viet" typeface="Times New Roman"/>
-        <a:font script="Uigh" typeface="Microsoft Uighur"/>
-        <a:font script="Geor" typeface="Sylfaen"/>
-        <a:font script="Armn" typeface="Arial"/>
-        <a:font script="Bugi" typeface="Leelawadee UI"/>
-        <a:font script="Bopo" typeface="Microsoft JhengHei"/>
-        <a:font script="Java" typeface="Javanese Text"/>
-        <a:font script="Lisu" typeface="Segoe UI"/>
-        <a:font script="Mymr" typeface="Myanmar Text"/>
-        <a:font script="Nkoo" typeface="Ebrima"/>
-        <a:font script="Olck" typeface="Nirmala UI"/>
-        <a:font script="Osma" typeface="Ebrima"/>
-        <a:font script="Phag" typeface="Phagspa"/>
-        <a:font script="Syrn" typeface="Estrangelo Edessa"/>
-        <a:font script="Syrj" typeface="Estrangelo Edessa"/>
-        <a:font script="Syre" typeface="Estrangelo Edessa"/>
-        <a:font script="Sora" typeface="Nirmala UI"/>
-        <a:font script="Tale" typeface="Microsoft Tai Le"/>
-        <a:font script="Talu" typeface="Microsoft New Tai Lue"/>
-        <a:font script="Tfng" typeface="Ebrima"/>
-      </a:majorFont>
-      <a:minorFont>
-        <a:latin typeface="Aptos" panose="02110004020202020204"/>
-        <a:ea typeface=""/>
-        <a:cs typeface=""/>
-        <a:font script="Jpan" typeface="游ゴシック"/>
-        <a:font script="Hang" typeface="맑은 고딕"/>
-        <a:font script="Hans" typeface="等线"/>
-        <a:font script="Hant" typeface="新細明體"/>
-        <a:font script="Arab" typeface="Arial"/>
-        <a:font script="Hebr" typeface="Arial"/>
-        <a:font script="Thai" typeface="Cordia New"/>
-        <a:font script="Ethi" typeface="Nyala"/>
-        <a:font script="Beng" typeface="Vrinda"/>
-        <a:font script="Gujr" typeface="Shruti"/>
-        <a:font script="Khmr" typeface="DaunPenh"/>
-        <a:font script="Knda" typeface="Tunga"/>
-        <a:font script="Guru" typeface="Raavi"/>
-        <a:font script="Cans" typeface="Euphemia"/>
-        <a:font script="Cher" typeface="Plantagenet Cherokee"/>
-        <a:font script="Yiii" typeface="Microsoft Yi Baiti"/>
-        <a:font script="Tibt" typeface="Microsoft Himalaya"/>
-        <a:font script="Thaa" typeface="MV Boli"/>
-        <a:font script="Deva" typeface="Mangal"/>
-        <a:font script="Telu" typeface="Gautami"/>
-        <a:font script="Taml" typeface="Latha"/>
-        <a:font script="Syrc" typeface="Estrangelo Edessa"/>
-        <a:font script="Orya" typeface="Kalinga"/>
-        <a:font script="Mlym" typeface="Kartika"/>
-        <a:font script="Laoo" typeface="DokChampa"/>
-        <a:font script="Sinh" typeface="Iskoola Pota"/>
-        <a:font script="Mong" typeface="Mongolian Baiti"/>
-        <a:font script="Viet" typeface="Arial"/>
-        <a:font script="Uigh" typeface="Microsoft Uighur"/>
-        <a:font script="Geor" typeface="Sylfaen"/>
-        <a:font script="Armn" typeface="Arial"/>
-        <a:font script="Bugi" typeface="Leelawadee UI"/>
-        <a:font script="Bopo" typeface="Microsoft JhengHei"/>
-        <a:font script="Java" typeface="Javanese Text"/>
-        <a:font script="Lisu" typeface="Segoe UI"/>
-        <a:font script="Mymr" typeface="Myanmar Text"/>
-        <a:font script="Nkoo" typeface="Ebrima"/>
-        <a:font script="Olck" typeface="Nirmala UI"/>
-        <a:font script="Osma" typeface="Ebrima"/>
-        <a:font script="Phag" typeface="Phagspa"/>
-        <a:font script="Syrn" typeface="Estrangelo Edessa"/>
-        <a:font script="Syrj" typeface="Estrangelo Edessa"/>
-        <a:font script="Syre" typeface="Estrangelo Edessa"/>
-        <a:font script="Sora" typeface="Nirmala UI"/>
-        <a:font script="Tale" typeface="Microsoft Tai Le"/>
-        <a:font script="Talu" typeface="Microsoft New Tai Lue"/>
-        <a:font script="Tfng" typeface="Ebrima"/>
-      </a:minorFont>
-    </a:fontScheme>
-    <a:fmtScheme name="Office">
-      <a:fillStyleLst>
-        <a:solidFill>
-          <a:schemeClr val="phClr"/>
-        </a:solidFill>
-        <a:gradFill rotWithShape="1">
-          <a:gsLst>
-            <a:gs pos="0">
-              <a:schemeClr val="phClr">
-                <a:lumMod val="110000"/>
-                <a:satMod val="105000"/>
-                <a:tint val="67000"/>
-              </a:schemeClr>
-            </a:gs>
-            <a:gs pos="50000">
-              <a:schemeClr val="phClr">
-                <a:lumMod val="105000"/>
-                <a:satMod val="103000"/>
-                <a:tint val="73000"/>
-              </a:schemeClr>
-            </a:gs>
-            <a:gs pos="100000">
-              <a:schemeClr val="phClr">
-                <a:lumMod val="105000"/>
-                <a:satMod val="109000"/>
-                <a:tint val="81000"/>
-              </a:schemeClr>
-            </a:gs>
-          </a:gsLst>
-          <a:lin ang="5400000" scaled="0"/>
-        </a:gradFill>
-        <a:gradFill rotWithShape="1">
-          <a:gsLst>
-            <a:gs pos="0">
-              <a:schemeClr val="phClr">
-                <a:satMod val="103000"/>
-                <a:lumMod val="102000"/>
-                <a:tint val="94000"/>
-              </a:schemeClr>
-            </a:gs>
-            <a:gs pos="50000">
-              <a:schemeClr val="phClr">
-                <a:satMod val="110000"/>
-                <a:lumMod val="100000"/>
-                <a:shade val="100000"/>
-              </a:schemeClr>
-            </a:gs>
-            <a:gs pos="100000">
-              <a:schemeClr val="phClr">
-                <a:lumMod val="99000"/>
-                <a:satMod val="120000"/>
-                <a:shade val="78000"/>
-              </a:schemeClr>
-            </a:gs>
-          </a:gsLst>
-          <a:lin ang="5400000" scaled="0"/>
-        </a:gradFill>
-      </a:fillStyleLst>
-      <a:lnStyleLst>
-        <a:ln w="12700" cap="flat" cmpd="sng" algn="ctr">
-          <a:solidFill>
-            <a:schemeClr val="phClr"/>
-          </a:solidFill>
-          <a:prstDash val="solid"/>
-          <a:miter lim="800000"/>
-        </a:ln>
-        <a:ln w="19050" cap="flat" cmpd="sng" algn="ctr">
-          <a:solidFill>
-            <a:schemeClr val="phClr"/>
-          </a:solidFill>
-          <a:prstDash val="solid"/>
-          <a:miter lim="800000"/>
-        </a:ln>
-        <a:ln w="25400" cap="flat" cmpd="sng" algn="ctr">
-          <a:solidFill>
-            <a:schemeClr val="phClr"/>
-          </a:solidFill>
-          <a:prstDash val="solid"/>
-          <a:miter lim="800000"/>
-        </a:ln>
-      </a:lnStyleLst>
-      <a:effectStyleLst>
-        <a:effectStyle>
-          <a:effectLst/>
-        </a:effectStyle>
-        <a:effectStyle>
-          <a:effectLst/>
-        </a:effectStyle>
-        <a:effectStyle>
-          <a:effectLst>
-            <a:outerShdw blurRad="57150" dist="19050" dir="5400000" algn="ctr" rotWithShape="0">
-              <a:srgbClr val="000000">
-                <a:alpha val="63000"/>
-              </a:srgbClr>
-            </a:outerShdw>
-          </a:effectLst>
-        </a:effectStyle>
-      </a:effectStyleLst>
-      <a:bgFillStyleLst>
-        <a:solidFill>
-          <a:schemeClr val="phClr"/>
-        </a:solidFill>
-        <a:solidFill>
-          <a:schemeClr val="phClr">
-            <a:tint val="95000"/>
-            <a:satMod val="170000"/>
-          </a:schemeClr>
-        </a:solidFill>
-        <a:gradFill rotWithShape="1">
-          <a:gsLst>
-            <a:gs pos="0">
-              <a:schemeClr val="phClr">
-                <a:tint val="93000"/>
-                <a:satMod val="150000"/>
-                <a:shade val="98000"/>
-                <a:lumMod val="102000"/>
-              </a:schemeClr>
-            </a:gs>
-            <a:gs pos="50000">
-              <a:schemeClr val="phClr">
-                <a:tint val="98000"/>
-                <a:satMod val="130000"/>
-                <a:shade val="90000"/>
-                <a:lumMod val="103000"/>
-              </a:schemeClr>
-            </a:gs>
-            <a:gs pos="100000">
-              <a:schemeClr val="phClr">
-                <a:shade val="63000"/>
-                <a:satMod val="120000"/>
-              </a:schemeClr>
-            </a:gs>
-          </a:gsLst>
-          <a:lin ang="5400000" scaled="0"/>
-        </a:gradFill>
-      </a:bgFillStyleLst>
-    </a:fmtScheme>
-  </a:themeElements>
-  <a:objectDefaults>
-    <a:lnDef>
-      <a:spPr/>
-      <a:bodyPr/>
-      <a:lstStyle/>
-      <a:style>
-        <a:lnRef idx="2">
-          <a:schemeClr val="accent1"/>
-        </a:lnRef>
-        <a:fillRef idx="0">
-          <a:schemeClr val="accent1"/>
-        </a:fillRef>
-        <a:effectRef idx="1">
-          <a:schemeClr val="accent1"/>
-        </a:effectRef>
-        <a:fontRef idx="minor">
-          <a:schemeClr val="tx1"/>
-        </a:fontRef>
-      </a:style>
-    </a:lnDef>
-  </a:objectDefaults>
-  <a:extraClrSchemeLst/>
-  <a:extLst>
-    <a:ext uri="{05A4C25C-085E-4340-85A3-A5531E510DB2}">
-      <thm15:themeFamily xmlns:thm15="http://schemas.microsoft.com/office/thememl/2012/main" name="Office Theme" id="{2E142A2C-CD16-42D6-873A-C26D2A0506FA}" vid="{1BDDFF52-6CD6-40A5-AB3C-68EB2F1E4D0A}"/>
-    </a:ext>
-  </a:extLst>
-</a:theme>
 </file>